--- a/Sathify_22Slide_Merged_Deck.pptx
+++ b/Sathify_22Slide_Merged_Deck.pptx
@@ -4,6 +4,9 @@
   <p:sldMasterIdLst>
     <p:sldMasterId id="2147483648" r:id="rId1"/>
   </p:sldMasterIdLst>
+  <p:notesMasterIdLst>
+    <p:notesMasterId r:id="rId24"/>
+  </p:notesMasterIdLst>
   <p:sldIdLst>
     <p:sldId id="256" r:id="rId2"/>
     <p:sldId id="257" r:id="rId3"/>
@@ -28,9 +31,6 @@
     <p:sldId id="276" r:id="rId22"/>
     <p:sldId id="277" r:id="rId23"/>
   </p:sldIdLst>
-  <p:notesMasterIdLst>
-    <p:notesMasterId r:id="rId24"/>
-  </p:notesMasterIdLst>
   <p:sldSz cx="12192000" cy="6858000"/>
   <p:notesSz cx="6858000" cy="12192000"/>
   <p:defaultTextStyle>
@@ -125,6 +125,11 @@
       </a:defRPr>
     </a:lvl9pPr>
   </p:defaultTextStyle>
+  <p:extLst>
+    <p:ext uri="{EFAFB233-063F-42B5-8137-9DF3F51BA10A}">
+      <p15:sldGuideLst xmlns:p15="http://schemas.microsoft.com/office/powerpoint/2012/main"/>
+    </p:ext>
+  </p:extLst>
 </p:presentation>
 </file>
 
@@ -150,234 +155,10 @@
           <a:chExt cx="0" cy="0"/>
         </a:xfrm>
       </p:grpSpPr>
-      <p:sp>
-        <p:nvSpPr>
-          <p:cNvPr id="2" name="Header Placeholder 1"/>
-          <p:cNvSpPr>
-            <a:spLocks noGrp="1"/>
-          </p:cNvSpPr>
-          <p:nvPr>
-            <p:ph type="hdr" sz="quarter"/>
-          </p:nvPr>
-        </p:nvSpPr>
-        <p:spPr>
-          <a:xfrm>
-            <a:off x="0" y="0"/>
-            <a:ext cx="2971800" cy="458788"/>
-          </a:xfrm>
-          <a:prstGeom prst="rect">
-            <a:avLst/>
-          </a:prstGeom>
-        </p:spPr>
-        <p:txBody>
-          <a:bodyPr vert="horz" lIns="91440" tIns="45720" rIns="91440" bIns="45720" rtlCol="0"/>
-          <a:lstStyle>
-            <a:lvl1pPr algn="l">
-              <a:defRPr sz="1200"/>
-            </a:lvl1pPr>
-          </a:lstStyle>
-          <a:p>
-            <a:endParaRPr lang="en-US"/>
-          </a:p>
-        </p:txBody>
-      </p:sp>
-      <p:sp>
-        <p:nvSpPr>
-          <p:cNvPr id="3" name="Date Placeholder 2"/>
-          <p:cNvSpPr>
-            <a:spLocks noGrp="1"/>
-          </p:cNvSpPr>
-          <p:nvPr>
-            <p:ph type="dt" idx="1"/>
-          </p:nvPr>
-        </p:nvSpPr>
-        <p:spPr>
-          <a:xfrm>
-            <a:off x="3884613" y="0"/>
-            <a:ext cx="2971800" cy="458788"/>
-          </a:xfrm>
-          <a:prstGeom prst="rect">
-            <a:avLst/>
-          </a:prstGeom>
-        </p:spPr>
-        <p:txBody>
-          <a:bodyPr vert="horz" lIns="91440" tIns="45720" rIns="91440" bIns="45720" rtlCol="0"/>
-          <a:lstStyle>
-            <a:lvl1pPr algn="r">
-              <a:defRPr sz="1200"/>
-            </a:lvl1pPr>
-          </a:lstStyle>
-          <a:p>
-            <a:fld id="{5282F153-3F37-0F45-9E97-73ACFA13230C}" type="datetimeFigureOut">
-              <a:rPr lang="en-US"/>
-              <a:t>7/23/19</a:t>
-            </a:fld>
-            <a:endParaRPr lang="en-US"/>
-          </a:p>
-        </p:txBody>
-      </p:sp>
-      <p:sp>
-        <p:nvSpPr>
-          <p:cNvPr id="4" name="Slide Image Placeholder 3"/>
-          <p:cNvSpPr>
-            <a:spLocks noGrp="1" noRot="1" noChangeAspect="1"/>
-          </p:cNvSpPr>
-          <p:nvPr>
-            <p:ph type="sldImg" idx="2"/>
-          </p:nvPr>
-        </p:nvSpPr>
-        <p:spPr>
-          <a:xfrm>
-            <a:off x="685800" y="1143000"/>
-            <a:ext cx="5486400" cy="3086100"/>
-          </a:xfrm>
-          <a:prstGeom prst="rect">
-            <a:avLst/>
-          </a:prstGeom>
-          <a:noFill/>
-          <a:ln w="12700">
-            <a:solidFill>
-              <a:prstClr val="black"/>
-            </a:solidFill>
-          </a:ln>
-        </p:spPr>
-        <p:txBody>
-          <a:bodyPr vert="horz" lIns="91440" tIns="45720" rIns="91440" bIns="45720" rtlCol="0" anchor="ctr"/>
-          <a:lstStyle/>
-          <a:p>
-            <a:endParaRPr lang="en-US"/>
-          </a:p>
-        </p:txBody>
-      </p:sp>
-      <p:sp>
-        <p:nvSpPr>
-          <p:cNvPr id="5" name="Notes Placeholder 4"/>
-          <p:cNvSpPr>
-            <a:spLocks noGrp="1"/>
-          </p:cNvSpPr>
-          <p:nvPr>
-            <p:ph type="body" sz="quarter" idx="3"/>
-          </p:nvPr>
-        </p:nvSpPr>
-        <p:spPr>
-          <a:xfrm>
-            <a:off x="685800" y="4400550"/>
-            <a:ext cx="5486400" cy="3600450"/>
-          </a:xfrm>
-          <a:prstGeom prst="rect">
-            <a:avLst/>
-          </a:prstGeom>
-        </p:spPr>
-        <p:txBody>
-          <a:bodyPr vert="horz" lIns="91440" tIns="45720" rIns="91440" bIns="45720" rtlCol="0"/>
-          <a:lstStyle/>
-          <a:p>
-            <a:pPr lvl="0"/>
-            <a:r>
-              <a:rPr lang="en-US"/>
-              <a:t>Click to edit Master text styles</a:t>
-            </a:r>
-          </a:p>
-          <a:p>
-            <a:pPr lvl="1"/>
-            <a:r>
-              <a:rPr lang="en-US"/>
-              <a:t>Second level</a:t>
-            </a:r>
-          </a:p>
-          <a:p>
-            <a:pPr lvl="2"/>
-            <a:r>
-              <a:rPr lang="en-US"/>
-              <a:t>Third level</a:t>
-            </a:r>
-          </a:p>
-          <a:p>
-            <a:pPr lvl="3"/>
-            <a:r>
-              <a:rPr lang="en-US"/>
-              <a:t>Fourth level</a:t>
-            </a:r>
-          </a:p>
-          <a:p>
-            <a:pPr lvl="4"/>
-            <a:r>
-              <a:rPr lang="en-US"/>
-              <a:t>Fifth level</a:t>
-            </a:r>
-          </a:p>
-        </p:txBody>
-      </p:sp>
-      <p:sp>
-        <p:nvSpPr>
-          <p:cNvPr id="6" name="Footer Placeholder 5"/>
-          <p:cNvSpPr>
-            <a:spLocks noGrp="1"/>
-          </p:cNvSpPr>
-          <p:nvPr>
-            <p:ph type="ftr" sz="quarter" idx="4"/>
-          </p:nvPr>
-        </p:nvSpPr>
-        <p:spPr>
-          <a:xfrm>
-            <a:off x="0" y="8685213"/>
-            <a:ext cx="2971800" cy="458787"/>
-          </a:xfrm>
-          <a:prstGeom prst="rect">
-            <a:avLst/>
-          </a:prstGeom>
-        </p:spPr>
-        <p:txBody>
-          <a:bodyPr vert="horz" lIns="91440" tIns="45720" rIns="91440" bIns="45720" rtlCol="0" anchor="b"/>
-          <a:lstStyle>
-            <a:lvl1pPr algn="l">
-              <a:defRPr sz="1200"/>
-            </a:lvl1pPr>
-          </a:lstStyle>
-          <a:p>
-            <a:endParaRPr lang="en-US"/>
-          </a:p>
-        </p:txBody>
-      </p:sp>
-      <p:sp>
-        <p:nvSpPr>
-          <p:cNvPr id="7" name="Slide Number Placeholder 6"/>
-          <p:cNvSpPr>
-            <a:spLocks noGrp="1"/>
-          </p:cNvSpPr>
-          <p:nvPr>
-            <p:ph type="sldNum" sz="quarter" idx="5"/>
-          </p:nvPr>
-        </p:nvSpPr>
-        <p:spPr>
-          <a:xfrm>
-            <a:off x="3884613" y="8685213"/>
-            <a:ext cx="2971800" cy="458787"/>
-          </a:xfrm>
-          <a:prstGeom prst="rect">
-            <a:avLst/>
-          </a:prstGeom>
-        </p:spPr>
-        <p:txBody>
-          <a:bodyPr vert="horz" lIns="91440" tIns="45720" rIns="91440" bIns="45720" rtlCol="0" anchor="b"/>
-          <a:lstStyle>
-            <a:lvl1pPr algn="r">
-              <a:defRPr sz="1200"/>
-            </a:lvl1pPr>
-          </a:lstStyle>
-          <a:p>
-            <a:fld id="{CE5E9CC1-C706-0F49-92D6-E571CC5EEA8F}" type="slidenum">
-              <a:rPr lang="en-US"/>
-              <a:t>‹#›</a:t>
-            </a:fld>
-            <a:endParaRPr lang="en-US"/>
-          </a:p>
-        </p:txBody>
-      </p:sp>
     </p:spTree>
     <p:extLst>
       <p:ext uri="{BB962C8B-B14F-4D97-AF65-F5344CB8AC3E}">
-        <p14:creationId xmlns:p14="http://schemas.microsoft.com/office/powerpoint/2010/main" val="1024086991"/>
+        <p14:creationId xmlns:p14="http://schemas.microsoft.com/office/powerpoint/2010/main" val="1736576872"/>
       </p:ext>
     </p:extLst>
   </p:cSld>
@@ -521,10 +302,6 @@
           <a:bodyPr/>
           <a:lstStyle/>
           <a:p>
-            <a:r>
-              <a:rPr lang="en-US" dirty="0"/>
-              <a:t/>
-            </a:r>
             <a:endParaRPr lang="en-US" dirty="0"/>
           </a:p>
         </p:txBody>
@@ -609,10 +386,6 @@
           <a:bodyPr/>
           <a:lstStyle/>
           <a:p>
-            <a:r>
-              <a:rPr lang="en-US" dirty="0"/>
-              <a:t/>
-            </a:r>
             <a:endParaRPr lang="en-US" dirty="0"/>
           </a:p>
         </p:txBody>
@@ -697,10 +470,6 @@
           <a:bodyPr/>
           <a:lstStyle/>
           <a:p>
-            <a:r>
-              <a:rPr lang="en-US" dirty="0"/>
-              <a:t/>
-            </a:r>
             <a:endParaRPr lang="en-US" dirty="0"/>
           </a:p>
         </p:txBody>
@@ -785,10 +554,6 @@
           <a:bodyPr/>
           <a:lstStyle/>
           <a:p>
-            <a:r>
-              <a:rPr lang="en-US" dirty="0"/>
-              <a:t/>
-            </a:r>
             <a:endParaRPr lang="en-US" dirty="0"/>
           </a:p>
         </p:txBody>
@@ -873,10 +638,6 @@
           <a:bodyPr/>
           <a:lstStyle/>
           <a:p>
-            <a:r>
-              <a:rPr lang="en-US" dirty="0"/>
-              <a:t/>
-            </a:r>
             <a:endParaRPr lang="en-US" dirty="0"/>
           </a:p>
         </p:txBody>
@@ -961,10 +722,6 @@
           <a:bodyPr/>
           <a:lstStyle/>
           <a:p>
-            <a:r>
-              <a:rPr lang="en-US" dirty="0"/>
-              <a:t/>
-            </a:r>
             <a:endParaRPr lang="en-US" dirty="0"/>
           </a:p>
         </p:txBody>
@@ -1049,10 +806,6 @@
           <a:bodyPr/>
           <a:lstStyle/>
           <a:p>
-            <a:r>
-              <a:rPr lang="en-US" dirty="0"/>
-              <a:t/>
-            </a:r>
             <a:endParaRPr lang="en-US" dirty="0"/>
           </a:p>
         </p:txBody>
@@ -1137,10 +890,6 @@
           <a:bodyPr/>
           <a:lstStyle/>
           <a:p>
-            <a:r>
-              <a:rPr lang="en-US" dirty="0"/>
-              <a:t/>
-            </a:r>
             <a:endParaRPr lang="en-US" dirty="0"/>
           </a:p>
         </p:txBody>
@@ -1225,10 +974,6 @@
           <a:bodyPr/>
           <a:lstStyle/>
           <a:p>
-            <a:r>
-              <a:rPr lang="en-US" dirty="0"/>
-              <a:t/>
-            </a:r>
             <a:endParaRPr lang="en-US" dirty="0"/>
           </a:p>
         </p:txBody>
@@ -1313,10 +1058,6 @@
           <a:bodyPr/>
           <a:lstStyle/>
           <a:p>
-            <a:r>
-              <a:rPr lang="en-US" dirty="0"/>
-              <a:t/>
-            </a:r>
             <a:endParaRPr lang="en-US" dirty="0"/>
           </a:p>
         </p:txBody>
@@ -1401,10 +1142,6 @@
           <a:bodyPr/>
           <a:lstStyle/>
           <a:p>
-            <a:r>
-              <a:rPr lang="en-US" dirty="0"/>
-              <a:t/>
-            </a:r>
             <a:endParaRPr lang="en-US" dirty="0"/>
           </a:p>
         </p:txBody>
@@ -1489,10 +1226,6 @@
           <a:bodyPr/>
           <a:lstStyle/>
           <a:p>
-            <a:r>
-              <a:rPr lang="en-US" dirty="0"/>
-              <a:t/>
-            </a:r>
             <a:endParaRPr lang="en-US" dirty="0"/>
           </a:p>
         </p:txBody>
@@ -1577,10 +1310,6 @@
           <a:bodyPr/>
           <a:lstStyle/>
           <a:p>
-            <a:r>
-              <a:rPr lang="en-US" dirty="0"/>
-              <a:t/>
-            </a:r>
             <a:endParaRPr lang="en-US" dirty="0"/>
           </a:p>
         </p:txBody>
@@ -1665,10 +1394,6 @@
           <a:bodyPr/>
           <a:lstStyle/>
           <a:p>
-            <a:r>
-              <a:rPr lang="en-US" dirty="0"/>
-              <a:t/>
-            </a:r>
             <a:endParaRPr lang="en-US" dirty="0"/>
           </a:p>
         </p:txBody>
@@ -1753,10 +1478,6 @@
           <a:bodyPr/>
           <a:lstStyle/>
           <a:p>
-            <a:r>
-              <a:rPr lang="en-US" dirty="0"/>
-              <a:t/>
-            </a:r>
             <a:endParaRPr lang="en-US" dirty="0"/>
           </a:p>
         </p:txBody>
@@ -1841,10 +1562,6 @@
           <a:bodyPr/>
           <a:lstStyle/>
           <a:p>
-            <a:r>
-              <a:rPr lang="en-US" dirty="0"/>
-              <a:t/>
-            </a:r>
             <a:endParaRPr lang="en-US" dirty="0"/>
           </a:p>
         </p:txBody>
@@ -1929,10 +1646,6 @@
           <a:bodyPr/>
           <a:lstStyle/>
           <a:p>
-            <a:r>
-              <a:rPr lang="en-US" dirty="0"/>
-              <a:t/>
-            </a:r>
             <a:endParaRPr lang="en-US" dirty="0"/>
           </a:p>
         </p:txBody>
@@ -2017,10 +1730,6 @@
           <a:bodyPr/>
           <a:lstStyle/>
           <a:p>
-            <a:r>
-              <a:rPr lang="en-US" dirty="0"/>
-              <a:t/>
-            </a:r>
             <a:endParaRPr lang="en-US" dirty="0"/>
           </a:p>
         </p:txBody>
@@ -2105,10 +1814,6 @@
           <a:bodyPr/>
           <a:lstStyle/>
           <a:p>
-            <a:r>
-              <a:rPr lang="en-US" dirty="0"/>
-              <a:t/>
-            </a:r>
             <a:endParaRPr lang="en-US" dirty="0"/>
           </a:p>
         </p:txBody>
@@ -2193,10 +1898,6 @@
           <a:bodyPr/>
           <a:lstStyle/>
           <a:p>
-            <a:r>
-              <a:rPr lang="en-US" dirty="0"/>
-              <a:t/>
-            </a:r>
             <a:endParaRPr lang="en-US" dirty="0"/>
           </a:p>
         </p:txBody>
@@ -2281,10 +1982,6 @@
           <a:bodyPr/>
           <a:lstStyle/>
           <a:p>
-            <a:r>
-              <a:rPr lang="en-US" dirty="0"/>
-              <a:t/>
-            </a:r>
             <a:endParaRPr lang="en-US" dirty="0"/>
           </a:p>
         </p:txBody>
@@ -2369,10 +2066,6 @@
           <a:bodyPr/>
           <a:lstStyle/>
           <a:p>
-            <a:r>
-              <a:rPr lang="en-US" dirty="0"/>
-              <a:t/>
-            </a:r>
             <a:endParaRPr lang="en-US" dirty="0"/>
           </a:p>
         </p:txBody>
@@ -2446,6 +2139,11 @@
 <file path=ppt/slideMasters/slideMaster1.xml><?xml version="1.0" encoding="utf-8"?>
 <p:sldMaster xmlns:a="http://schemas.openxmlformats.org/drawingml/2006/main" xmlns:r="http://schemas.openxmlformats.org/officeDocument/2006/relationships" xmlns:p="http://schemas.openxmlformats.org/presentationml/2006/main">
   <p:cSld>
+    <p:bg>
+      <p:bgRef idx="1001">
+        <a:schemeClr val="bg1"/>
+      </p:bgRef>
+    </p:bg>
     <p:spTree>
       <p:nvGrpSpPr>
         <p:cNvPr id="1" name=""/>
@@ -2728,6 +2426,7 @@
         <a:solidFill>
           <a:srgbClr val="0D1225"/>
         </a:solidFill>
+        <a:effectLst/>
       </p:bgPr>
     </p:bg>
     <p:spTree>
@@ -2765,11 +2464,11 @@
           <a:bodyPr wrap="square" lIns="0" tIns="0" rIns="0" bIns="0" rtlCol="0" anchor="ctr"/>
           <a:lstStyle/>
           <a:p>
-            <a:pPr indent="0" marL="0">
-              <a:buNone/>
-            </a:pPr>
-            <a:r>
-              <a:rPr lang="en-US" sz="1300" b="1" spc="400" kern="0" dirty="0">
+            <a:pPr marL="0" indent="0">
+              <a:buNone/>
+            </a:pPr>
+            <a:r>
+              <a:rPr lang="en-US" sz="1300" b="1" kern="0" spc="400" dirty="0">
                 <a:solidFill>
                   <a:srgbClr val="6E7BA0"/>
                 </a:solidFill>
@@ -2804,7 +2503,7 @@
           <a:bodyPr wrap="square" lIns="0" tIns="0" rIns="0" bIns="0" rtlCol="0" anchor="ctr"/>
           <a:lstStyle/>
           <a:p>
-            <a:pPr indent="0" marL="0">
+            <a:pPr marL="0" indent="0">
               <a:buNone/>
             </a:pPr>
             <a:r>
@@ -2843,7 +2542,7 @@
           <a:bodyPr wrap="square" lIns="0" tIns="0" rIns="0" bIns="0" rtlCol="0" anchor="ctr"/>
           <a:lstStyle/>
           <a:p>
-            <a:pPr indent="0" marL="0">
+            <a:pPr marL="0" indent="0">
               <a:lnSpc>
                 <a:spcPct val="125000"/>
               </a:lnSpc>
@@ -2885,11 +2584,11 @@
           <a:bodyPr wrap="square" lIns="0" tIns="0" rIns="0" bIns="0" rtlCol="0" anchor="ctr"/>
           <a:lstStyle/>
           <a:p>
-            <a:pPr indent="0" marL="0">
-              <a:buNone/>
-            </a:pPr>
-            <a:r>
-              <a:rPr lang="en-US" sz="1100" b="1" spc="200" kern="0" dirty="0">
+            <a:pPr marL="0" indent="0">
+              <a:buNone/>
+            </a:pPr>
+            <a:r>
+              <a:rPr lang="en-US" sz="1100" b="1" kern="0" spc="200" dirty="0">
                 <a:solidFill>
                   <a:srgbClr val="F2B705"/>
                 </a:solidFill>
@@ -3018,6 +2717,18 @@
   <p:clrMapOvr>
     <a:masterClrMapping/>
   </p:clrMapOvr>
+  <mc:AlternateContent xmlns:mc="http://schemas.openxmlformats.org/markup-compatibility/2006">
+    <mc:Choice xmlns:p159="http://schemas.microsoft.com/office/powerpoint/2015/09/main" Requires="p159">
+      <p:transition xmlns:p14="http://schemas.microsoft.com/office/powerpoint/2010/main" spd="slow" p14:dur="2000">
+        <p159:morph option="byObject"/>
+      </p:transition>
+    </mc:Choice>
+    <mc:Fallback>
+      <p:transition spd="slow">
+        <p:fade/>
+      </p:transition>
+    </mc:Fallback>
+  </mc:AlternateContent>
 </p:sld>
 </file>
 
@@ -3029,6 +2740,7 @@
         <a:solidFill>
           <a:srgbClr val="0D1225"/>
         </a:solidFill>
+        <a:effectLst/>
       </p:bgPr>
     </p:bg>
     <p:spTree>
@@ -3066,11 +2778,11 @@
           <a:bodyPr wrap="square" lIns="0" tIns="0" rIns="0" bIns="0" rtlCol="0" anchor="ctr"/>
           <a:lstStyle/>
           <a:p>
-            <a:pPr algn="l" indent="0" marL="0">
-              <a:buNone/>
-            </a:pPr>
-            <a:r>
-              <a:rPr lang="en-US" sz="1100" b="1" spc="300" kern="0" dirty="0">
+            <a:pPr marL="0" indent="0" algn="l">
+              <a:buNone/>
+            </a:pPr>
+            <a:r>
+              <a:rPr lang="en-US" sz="1100" b="1" kern="0" spc="300" dirty="0">
                 <a:solidFill>
                   <a:srgbClr val="6E7BA0"/>
                 </a:solidFill>
@@ -3105,11 +2817,11 @@
           <a:bodyPr wrap="square" lIns="0" tIns="0" rIns="0" bIns="0" rtlCol="0" anchor="ctr"/>
           <a:lstStyle/>
           <a:p>
-            <a:pPr algn="r" indent="0" marL="0">
-              <a:buNone/>
-            </a:pPr>
-            <a:r>
-              <a:rPr lang="en-US" sz="1100" b="1" spc="200" kern="0" dirty="0">
+            <a:pPr marL="0" indent="0" algn="r">
+              <a:buNone/>
+            </a:pPr>
+            <a:r>
+              <a:rPr lang="en-US" sz="1100" b="1" kern="0" spc="200" dirty="0">
                 <a:solidFill>
                   <a:srgbClr val="F2B705"/>
                 </a:solidFill>
@@ -3144,7 +2856,7 @@
           <a:bodyPr wrap="square" lIns="0" tIns="0" rIns="0" bIns="0" rtlCol="0" anchor="t"/>
           <a:lstStyle/>
           <a:p>
-            <a:pPr algn="l" indent="0" marL="0">
+            <a:pPr marL="0" indent="0" algn="l">
               <a:lnSpc>
                 <a:spcPct val="103000"/>
               </a:lnSpc>
@@ -3164,7 +2876,7 @@
             <a:endParaRPr lang="en-US" sz="3400" dirty="0"/>
           </a:p>
           <a:p>
-            <a:pPr algn="l" indent="0" marL="0">
+            <a:pPr marL="0" indent="0" algn="l">
               <a:lnSpc>
                 <a:spcPct val="103000"/>
               </a:lnSpc>
@@ -3206,7 +2918,7 @@
           <a:bodyPr wrap="square" lIns="0" tIns="0" rIns="0" bIns="0" rtlCol="0" anchor="t"/>
           <a:lstStyle/>
           <a:p>
-            <a:pPr algn="l" indent="0" marL="0">
+            <a:pPr marL="0" indent="0" algn="l">
               <a:lnSpc>
                 <a:spcPct val="128000"/>
               </a:lnSpc>
@@ -3293,7 +3005,7 @@
             <a:prstDash val="solid"/>
           </a:ln>
           <a:effectLst>
-            <a:outerShdw sx="100000" sy="100000" kx="0" ky="0" algn="bl" rotWithShape="0" blurRad="177800" dist="76200" dir="5400000">
+            <a:outerShdw blurRad="177800" dist="76200" dir="5400000" algn="bl" rotWithShape="0">
               <a:srgbClr val="000000">
                 <a:alpha val="45000"/>
               </a:srgbClr>
@@ -3584,11 +3296,11 @@
           <a:bodyPr wrap="square" lIns="0" tIns="0" rIns="0" bIns="0" rtlCol="0" anchor="ctr"/>
           <a:lstStyle/>
           <a:p>
-            <a:pPr algn="ctr" indent="0" marL="0">
-              <a:buNone/>
-            </a:pPr>
-            <a:r>
-              <a:rPr lang="en-US" sz="1000" b="1" spc="200" kern="0" dirty="0">
+            <a:pPr marL="0" indent="0" algn="ctr">
+              <a:buNone/>
+            </a:pPr>
+            <a:r>
+              <a:rPr lang="en-US" sz="1000" b="1" kern="0" spc="200" dirty="0">
                 <a:solidFill>
                   <a:srgbClr val="6E7BA0"/>
                 </a:solidFill>
@@ -3607,9 +3319,18 @@
   <p:clrMapOvr>
     <a:masterClrMapping/>
   </p:clrMapOvr>
-  <p:transition xmlns:p14="http://schemas.microsoft.com/office/powerpoint/2010/main" p14:dur="700" spd="slow">
-    <p159:morph xmlns:p159="http://schemas.microsoft.com/office/powerpoint/2015/09/main" option="byObject"/>
-  </p:transition>
+  <mc:AlternateContent xmlns:mc="http://schemas.openxmlformats.org/markup-compatibility/2006">
+    <mc:Choice xmlns:p159="http://schemas.microsoft.com/office/powerpoint/2015/09/main" Requires="p159">
+      <p:transition xmlns:p14="http://schemas.microsoft.com/office/powerpoint/2010/main" spd="med" p14:dur="700">
+        <p159:morph option="byObject"/>
+      </p:transition>
+    </mc:Choice>
+    <mc:Fallback>
+      <p:transition spd="med">
+        <p:fade/>
+      </p:transition>
+    </mc:Fallback>
+  </mc:AlternateContent>
 </p:sld>
 </file>
 
@@ -3621,6 +3342,7 @@
         <a:solidFill>
           <a:srgbClr val="0D1225"/>
         </a:solidFill>
+        <a:effectLst/>
       </p:bgPr>
     </p:bg>
     <p:spTree>
@@ -3658,11 +3380,11 @@
           <a:bodyPr wrap="square" lIns="0" tIns="0" rIns="0" bIns="0" rtlCol="0" anchor="ctr"/>
           <a:lstStyle/>
           <a:p>
-            <a:pPr algn="l" indent="0" marL="0">
-              <a:buNone/>
-            </a:pPr>
-            <a:r>
-              <a:rPr lang="en-US" sz="1100" b="1" spc="300" kern="0" dirty="0">
+            <a:pPr marL="0" indent="0" algn="l">
+              <a:buNone/>
+            </a:pPr>
+            <a:r>
+              <a:rPr lang="en-US" sz="1100" b="1" kern="0" spc="300" dirty="0">
                 <a:solidFill>
                   <a:srgbClr val="6E7BA0"/>
                 </a:solidFill>
@@ -3697,11 +3419,11 @@
           <a:bodyPr wrap="square" lIns="0" tIns="0" rIns="0" bIns="0" rtlCol="0" anchor="ctr"/>
           <a:lstStyle/>
           <a:p>
-            <a:pPr algn="r" indent="0" marL="0">
-              <a:buNone/>
-            </a:pPr>
-            <a:r>
-              <a:rPr lang="en-US" sz="1100" b="1" spc="200" kern="0" dirty="0">
+            <a:pPr marL="0" indent="0" algn="r">
+              <a:buNone/>
+            </a:pPr>
+            <a:r>
+              <a:rPr lang="en-US" sz="1100" b="1" kern="0" spc="200" dirty="0">
                 <a:solidFill>
                   <a:srgbClr val="F2B705"/>
                 </a:solidFill>
@@ -3736,7 +3458,7 @@
           <a:bodyPr wrap="square" lIns="0" tIns="0" rIns="0" bIns="0" rtlCol="0" anchor="t"/>
           <a:lstStyle/>
           <a:p>
-            <a:pPr algn="l" indent="0" marL="0">
+            <a:pPr marL="0" indent="0" algn="l">
               <a:lnSpc>
                 <a:spcPct val="103000"/>
               </a:lnSpc>
@@ -3756,7 +3478,7 @@
             <a:endParaRPr lang="en-US" sz="3400" dirty="0"/>
           </a:p>
           <a:p>
-            <a:pPr algn="l" indent="0" marL="0">
+            <a:pPr marL="0" indent="0" algn="l">
               <a:lnSpc>
                 <a:spcPct val="103000"/>
               </a:lnSpc>
@@ -3798,7 +3520,7 @@
           <a:bodyPr wrap="square" lIns="0" tIns="0" rIns="0" bIns="0" rtlCol="0" anchor="t"/>
           <a:lstStyle/>
           <a:p>
-            <a:pPr algn="l" indent="0" marL="0">
+            <a:pPr marL="0" indent="0" algn="l">
               <a:lnSpc>
                 <a:spcPct val="128000"/>
               </a:lnSpc>
@@ -3885,7 +3607,7 @@
             <a:prstDash val="solid"/>
           </a:ln>
           <a:effectLst>
-            <a:outerShdw sx="100000" sy="100000" kx="0" ky="0" algn="bl" rotWithShape="0" blurRad="177800" dist="76200" dir="5400000">
+            <a:outerShdw blurRad="177800" dist="76200" dir="5400000" algn="bl" rotWithShape="0">
               <a:srgbClr val="000000">
                 <a:alpha val="45000"/>
               </a:srgbClr>
@@ -4056,11 +3778,11 @@
           <a:bodyPr wrap="square" lIns="0" tIns="0" rIns="0" bIns="0" rtlCol="0" anchor="ctr"/>
           <a:lstStyle/>
           <a:p>
-            <a:pPr algn="ctr" indent="0" marL="0">
-              <a:buNone/>
-            </a:pPr>
-            <a:r>
-              <a:rPr lang="en-US" sz="1000" b="1" spc="200" kern="0" dirty="0">
+            <a:pPr marL="0" indent="0" algn="ctr">
+              <a:buNone/>
+            </a:pPr>
+            <a:r>
+              <a:rPr lang="en-US" sz="1000" b="1" kern="0" spc="200" dirty="0">
                 <a:solidFill>
                   <a:srgbClr val="6E7BA0"/>
                 </a:solidFill>
@@ -4079,9 +3801,18 @@
   <p:clrMapOvr>
     <a:masterClrMapping/>
   </p:clrMapOvr>
-  <p:transition xmlns:p14="http://schemas.microsoft.com/office/powerpoint/2010/main" p14:dur="700" spd="slow">
-    <p159:morph xmlns:p159="http://schemas.microsoft.com/office/powerpoint/2015/09/main" option="byObject"/>
-  </p:transition>
+  <mc:AlternateContent xmlns:mc="http://schemas.openxmlformats.org/markup-compatibility/2006">
+    <mc:Choice xmlns:p159="http://schemas.microsoft.com/office/powerpoint/2015/09/main" Requires="p159">
+      <p:transition xmlns:p14="http://schemas.microsoft.com/office/powerpoint/2010/main" spd="med" p14:dur="700">
+        <p159:morph option="byObject"/>
+      </p:transition>
+    </mc:Choice>
+    <mc:Fallback>
+      <p:transition spd="med">
+        <p:fade/>
+      </p:transition>
+    </mc:Fallback>
+  </mc:AlternateContent>
 </p:sld>
 </file>
 
@@ -4093,6 +3824,7 @@
         <a:solidFill>
           <a:srgbClr val="0D1225"/>
         </a:solidFill>
+        <a:effectLst/>
       </p:bgPr>
     </p:bg>
     <p:spTree>
@@ -4130,11 +3862,11 @@
           <a:bodyPr wrap="square" lIns="0" tIns="0" rIns="0" bIns="0" rtlCol="0" anchor="ctr"/>
           <a:lstStyle/>
           <a:p>
-            <a:pPr algn="l" indent="0" marL="0">
-              <a:buNone/>
-            </a:pPr>
-            <a:r>
-              <a:rPr lang="en-US" sz="1100" b="1" spc="300" kern="0" dirty="0">
+            <a:pPr marL="0" indent="0" algn="l">
+              <a:buNone/>
+            </a:pPr>
+            <a:r>
+              <a:rPr lang="en-US" sz="1100" b="1" kern="0" spc="300" dirty="0">
                 <a:solidFill>
                   <a:srgbClr val="6E7BA0"/>
                 </a:solidFill>
@@ -4169,11 +3901,11 @@
           <a:bodyPr wrap="square" lIns="0" tIns="0" rIns="0" bIns="0" rtlCol="0" anchor="ctr"/>
           <a:lstStyle/>
           <a:p>
-            <a:pPr algn="r" indent="0" marL="0">
-              <a:buNone/>
-            </a:pPr>
-            <a:r>
-              <a:rPr lang="en-US" sz="1100" b="1" spc="200" kern="0" dirty="0">
+            <a:pPr marL="0" indent="0" algn="r">
+              <a:buNone/>
+            </a:pPr>
+            <a:r>
+              <a:rPr lang="en-US" sz="1100" b="1" kern="0" spc="200" dirty="0">
                 <a:solidFill>
                   <a:srgbClr val="F2B705"/>
                 </a:solidFill>
@@ -4208,7 +3940,7 @@
           <a:bodyPr wrap="square" lIns="0" tIns="0" rIns="0" bIns="0" rtlCol="0" anchor="t"/>
           <a:lstStyle/>
           <a:p>
-            <a:pPr algn="l" indent="0" marL="0">
+            <a:pPr marL="0" indent="0" algn="l">
               <a:lnSpc>
                 <a:spcPct val="103000"/>
               </a:lnSpc>
@@ -4228,7 +3960,7 @@
             <a:endParaRPr lang="en-US" sz="3400" dirty="0"/>
           </a:p>
           <a:p>
-            <a:pPr algn="l" indent="0" marL="0">
+            <a:pPr marL="0" indent="0" algn="l">
               <a:lnSpc>
                 <a:spcPct val="103000"/>
               </a:lnSpc>
@@ -4270,7 +4002,7 @@
           <a:bodyPr wrap="square" lIns="0" tIns="0" rIns="0" bIns="0" rtlCol="0" anchor="t"/>
           <a:lstStyle/>
           <a:p>
-            <a:pPr algn="l" indent="0" marL="0">
+            <a:pPr marL="0" indent="0" algn="l">
               <a:lnSpc>
                 <a:spcPct val="128000"/>
               </a:lnSpc>
@@ -4357,7 +4089,7 @@
             <a:prstDash val="solid"/>
           </a:ln>
           <a:effectLst>
-            <a:outerShdw sx="100000" sy="100000" kx="0" ky="0" algn="bl" rotWithShape="0" blurRad="177800" dist="76200" dir="5400000">
+            <a:outerShdw blurRad="177800" dist="76200" dir="5400000" algn="bl" rotWithShape="0">
               <a:srgbClr val="000000">
                 <a:alpha val="45000"/>
               </a:srgbClr>
@@ -4490,11 +4222,11 @@
           <a:bodyPr wrap="square" lIns="0" tIns="0" rIns="0" bIns="0" rtlCol="0" anchor="ctr"/>
           <a:lstStyle/>
           <a:p>
-            <a:pPr indent="0" marL="0">
-              <a:buNone/>
-            </a:pPr>
-            <a:r>
-              <a:rPr lang="en-US" sz="1050" b="1" spc="60" kern="0" dirty="0">
+            <a:pPr marL="0" indent="0">
+              <a:buNone/>
+            </a:pPr>
+            <a:r>
+              <a:rPr lang="en-US" sz="1050" b="1" kern="0" spc="60" dirty="0">
                 <a:solidFill>
                   <a:srgbClr val="13B8A0"/>
                 </a:solidFill>
@@ -4529,7 +4261,7 @@
           <a:bodyPr wrap="square" lIns="0" tIns="0" rIns="0" bIns="0" rtlCol="0" anchor="ctr"/>
           <a:lstStyle/>
           <a:p>
-            <a:pPr indent="0" marL="0">
+            <a:pPr marL="0" indent="0">
               <a:lnSpc>
                 <a:spcPct val="112000"/>
               </a:lnSpc>
@@ -4593,11 +4325,11 @@
           <a:bodyPr wrap="square" lIns="0" tIns="0" rIns="0" bIns="0" rtlCol="0" anchor="ctr"/>
           <a:lstStyle/>
           <a:p>
-            <a:pPr indent="0" marL="0">
-              <a:buNone/>
-            </a:pPr>
-            <a:r>
-              <a:rPr lang="en-US" sz="1050" b="1" spc="60" kern="0" dirty="0">
+            <a:pPr marL="0" indent="0">
+              <a:buNone/>
+            </a:pPr>
+            <a:r>
+              <a:rPr lang="en-US" sz="1050" b="1" kern="0" spc="60" dirty="0">
                 <a:solidFill>
                   <a:srgbClr val="13B8A0"/>
                 </a:solidFill>
@@ -4632,7 +4364,7 @@
           <a:bodyPr wrap="square" lIns="0" tIns="0" rIns="0" bIns="0" rtlCol="0" anchor="ctr"/>
           <a:lstStyle/>
           <a:p>
-            <a:pPr indent="0" marL="0">
+            <a:pPr marL="0" indent="0">
               <a:lnSpc>
                 <a:spcPct val="112000"/>
               </a:lnSpc>
@@ -4696,11 +4428,11 @@
           <a:bodyPr wrap="square" lIns="0" tIns="0" rIns="0" bIns="0" rtlCol="0" anchor="ctr"/>
           <a:lstStyle/>
           <a:p>
-            <a:pPr indent="0" marL="0">
-              <a:buNone/>
-            </a:pPr>
-            <a:r>
-              <a:rPr lang="en-US" sz="1050" b="1" spc="60" kern="0" dirty="0">
+            <a:pPr marL="0" indent="0">
+              <a:buNone/>
+            </a:pPr>
+            <a:r>
+              <a:rPr lang="en-US" sz="1050" b="1" kern="0" spc="60" dirty="0">
                 <a:solidFill>
                   <a:srgbClr val="13B8A0"/>
                 </a:solidFill>
@@ -4735,7 +4467,7 @@
           <a:bodyPr wrap="square" lIns="0" tIns="0" rIns="0" bIns="0" rtlCol="0" anchor="ctr"/>
           <a:lstStyle/>
           <a:p>
-            <a:pPr indent="0" marL="0">
+            <a:pPr marL="0" indent="0">
               <a:lnSpc>
                 <a:spcPct val="112000"/>
               </a:lnSpc>
@@ -4761,9 +4493,18 @@
   <p:clrMapOvr>
     <a:masterClrMapping/>
   </p:clrMapOvr>
-  <p:transition xmlns:p14="http://schemas.microsoft.com/office/powerpoint/2010/main" p14:dur="700" spd="slow">
-    <p159:morph xmlns:p159="http://schemas.microsoft.com/office/powerpoint/2015/09/main" option="byObject"/>
-  </p:transition>
+  <mc:AlternateContent xmlns:mc="http://schemas.openxmlformats.org/markup-compatibility/2006">
+    <mc:Choice xmlns:p159="http://schemas.microsoft.com/office/powerpoint/2015/09/main" Requires="p159">
+      <p:transition xmlns:p14="http://schemas.microsoft.com/office/powerpoint/2010/main" spd="med" p14:dur="700">
+        <p159:morph option="byObject"/>
+      </p:transition>
+    </mc:Choice>
+    <mc:Fallback>
+      <p:transition spd="med">
+        <p:fade/>
+      </p:transition>
+    </mc:Fallback>
+  </mc:AlternateContent>
 </p:sld>
 </file>
 
@@ -4775,6 +4516,7 @@
         <a:solidFill>
           <a:srgbClr val="0D1225"/>
         </a:solidFill>
+        <a:effectLst/>
       </p:bgPr>
     </p:bg>
     <p:spTree>
@@ -4812,11 +4554,11 @@
           <a:bodyPr wrap="square" lIns="0" tIns="0" rIns="0" bIns="0" rtlCol="0" anchor="ctr"/>
           <a:lstStyle/>
           <a:p>
-            <a:pPr algn="l" indent="0" marL="0">
-              <a:buNone/>
-            </a:pPr>
-            <a:r>
-              <a:rPr lang="en-US" sz="1100" b="1" spc="300" kern="0" dirty="0">
+            <a:pPr marL="0" indent="0" algn="l">
+              <a:buNone/>
+            </a:pPr>
+            <a:r>
+              <a:rPr lang="en-US" sz="1100" b="1" kern="0" spc="300" dirty="0">
                 <a:solidFill>
                   <a:srgbClr val="6E7BA0"/>
                 </a:solidFill>
@@ -4851,11 +4593,11 @@
           <a:bodyPr wrap="square" lIns="0" tIns="0" rIns="0" bIns="0" rtlCol="0" anchor="ctr"/>
           <a:lstStyle/>
           <a:p>
-            <a:pPr algn="r" indent="0" marL="0">
-              <a:buNone/>
-            </a:pPr>
-            <a:r>
-              <a:rPr lang="en-US" sz="1100" b="1" spc="200" kern="0" dirty="0">
+            <a:pPr marL="0" indent="0" algn="r">
+              <a:buNone/>
+            </a:pPr>
+            <a:r>
+              <a:rPr lang="en-US" sz="1100" b="1" kern="0" spc="200" dirty="0">
                 <a:solidFill>
                   <a:srgbClr val="F2B705"/>
                 </a:solidFill>
@@ -4890,7 +4632,7 @@
           <a:bodyPr wrap="square" lIns="0" tIns="0" rIns="0" bIns="0" rtlCol="0" anchor="t"/>
           <a:lstStyle/>
           <a:p>
-            <a:pPr algn="l" indent="0" marL="0">
+            <a:pPr marL="0" indent="0" algn="l">
               <a:lnSpc>
                 <a:spcPct val="103000"/>
               </a:lnSpc>
@@ -4910,7 +4652,7 @@
             <a:endParaRPr lang="en-US" sz="3400" dirty="0"/>
           </a:p>
           <a:p>
-            <a:pPr algn="l" indent="0" marL="0">
+            <a:pPr marL="0" indent="0" algn="l">
               <a:lnSpc>
                 <a:spcPct val="103000"/>
               </a:lnSpc>
@@ -4952,7 +4694,7 @@
           <a:bodyPr wrap="square" lIns="0" tIns="0" rIns="0" bIns="0" rtlCol="0" anchor="t"/>
           <a:lstStyle/>
           <a:p>
-            <a:pPr algn="l" indent="0" marL="0">
+            <a:pPr marL="0" indent="0" algn="l">
               <a:lnSpc>
                 <a:spcPct val="128000"/>
               </a:lnSpc>
@@ -5039,7 +4781,7 @@
             <a:prstDash val="solid"/>
           </a:ln>
           <a:effectLst>
-            <a:outerShdw sx="100000" sy="100000" kx="0" ky="0" algn="bl" rotWithShape="0" blurRad="177800" dist="76200" dir="5400000">
+            <a:outerShdw blurRad="177800" dist="76200" dir="5400000" algn="bl" rotWithShape="0">
               <a:srgbClr val="000000">
                 <a:alpha val="45000"/>
               </a:srgbClr>
@@ -5228,7 +4970,7 @@
           <a:bodyPr wrap="square" lIns="0" tIns="0" rIns="0" bIns="0" rtlCol="0" anchor="ctr"/>
           <a:lstStyle/>
           <a:p>
-            <a:pPr algn="ctr" indent="0" marL="0">
+            <a:pPr marL="0" indent="0" algn="ctr">
               <a:buNone/>
             </a:pPr>
             <a:r>
@@ -5267,7 +5009,7 @@
           <a:bodyPr wrap="square" lIns="0" tIns="0" rIns="0" bIns="0" rtlCol="0" anchor="ctr"/>
           <a:lstStyle/>
           <a:p>
-            <a:pPr algn="ctr" indent="0" marL="0">
+            <a:pPr marL="0" indent="0" algn="ctr">
               <a:lnSpc>
                 <a:spcPct val="105000"/>
               </a:lnSpc>
@@ -5336,7 +5078,7 @@
           <a:bodyPr wrap="square" lIns="0" tIns="0" rIns="0" bIns="0" rtlCol="0" anchor="ctr"/>
           <a:lstStyle/>
           <a:p>
-            <a:pPr algn="ctr" indent="0" marL="0">
+            <a:pPr marL="0" indent="0" algn="ctr">
               <a:buNone/>
             </a:pPr>
             <a:r>
@@ -5375,7 +5117,7 @@
           <a:bodyPr wrap="square" lIns="0" tIns="0" rIns="0" bIns="0" rtlCol="0" anchor="ctr"/>
           <a:lstStyle/>
           <a:p>
-            <a:pPr algn="ctr" indent="0" marL="0">
+            <a:pPr marL="0" indent="0" algn="ctr">
               <a:lnSpc>
                 <a:spcPct val="105000"/>
               </a:lnSpc>
@@ -5444,7 +5186,7 @@
           <a:bodyPr wrap="square" lIns="0" tIns="0" rIns="0" bIns="0" rtlCol="0" anchor="ctr"/>
           <a:lstStyle/>
           <a:p>
-            <a:pPr algn="ctr" indent="0" marL="0">
+            <a:pPr marL="0" indent="0" algn="ctr">
               <a:buNone/>
             </a:pPr>
             <a:r>
@@ -5483,7 +5225,7 @@
           <a:bodyPr wrap="square" lIns="0" tIns="0" rIns="0" bIns="0" rtlCol="0" anchor="ctr"/>
           <a:lstStyle/>
           <a:p>
-            <a:pPr algn="ctr" indent="0" marL="0">
+            <a:pPr marL="0" indent="0" algn="ctr">
               <a:lnSpc>
                 <a:spcPct val="105000"/>
               </a:lnSpc>
@@ -5552,7 +5294,7 @@
           <a:bodyPr wrap="square" lIns="0" tIns="0" rIns="0" bIns="0" rtlCol="0" anchor="ctr"/>
           <a:lstStyle/>
           <a:p>
-            <a:pPr algn="ctr" indent="0" marL="0">
+            <a:pPr marL="0" indent="0" algn="ctr">
               <a:buNone/>
             </a:pPr>
             <a:r>
@@ -5591,7 +5333,7 @@
           <a:bodyPr wrap="square" lIns="0" tIns="0" rIns="0" bIns="0" rtlCol="0" anchor="ctr"/>
           <a:lstStyle/>
           <a:p>
-            <a:pPr algn="ctr" indent="0" marL="0">
+            <a:pPr marL="0" indent="0" algn="ctr">
               <a:lnSpc>
                 <a:spcPct val="105000"/>
               </a:lnSpc>
@@ -5633,7 +5375,7 @@
           <a:bodyPr wrap="square" lIns="0" tIns="0" rIns="0" bIns="0" rtlCol="0" anchor="ctr"/>
           <a:lstStyle/>
           <a:p>
-            <a:pPr algn="ctr" indent="0" marL="0">
+            <a:pPr marL="0" indent="0" algn="ctr">
               <a:buNone/>
             </a:pPr>
             <a:r>
@@ -5656,9 +5398,18 @@
   <p:clrMapOvr>
     <a:masterClrMapping/>
   </p:clrMapOvr>
-  <p:transition xmlns:p14="http://schemas.microsoft.com/office/powerpoint/2010/main" p14:dur="700" spd="slow">
-    <p159:morph xmlns:p159="http://schemas.microsoft.com/office/powerpoint/2015/09/main" option="byObject"/>
-  </p:transition>
+  <mc:AlternateContent xmlns:mc="http://schemas.openxmlformats.org/markup-compatibility/2006">
+    <mc:Choice xmlns:p159="http://schemas.microsoft.com/office/powerpoint/2015/09/main" Requires="p159">
+      <p:transition xmlns:p14="http://schemas.microsoft.com/office/powerpoint/2010/main" spd="med" p14:dur="700">
+        <p159:morph option="byObject"/>
+      </p:transition>
+    </mc:Choice>
+    <mc:Fallback>
+      <p:transition spd="med">
+        <p:fade/>
+      </p:transition>
+    </mc:Fallback>
+  </mc:AlternateContent>
 </p:sld>
 </file>
 
@@ -5670,6 +5421,7 @@
         <a:solidFill>
           <a:srgbClr val="0D1225"/>
         </a:solidFill>
+        <a:effectLst/>
       </p:bgPr>
     </p:bg>
     <p:spTree>
@@ -5707,11 +5459,11 @@
           <a:bodyPr wrap="square" lIns="0" tIns="0" rIns="0" bIns="0" rtlCol="0" anchor="ctr"/>
           <a:lstStyle/>
           <a:p>
-            <a:pPr algn="l" indent="0" marL="0">
-              <a:buNone/>
-            </a:pPr>
-            <a:r>
-              <a:rPr lang="en-US" sz="1100" b="1" spc="300" kern="0" dirty="0">
+            <a:pPr marL="0" indent="0" algn="l">
+              <a:buNone/>
+            </a:pPr>
+            <a:r>
+              <a:rPr lang="en-US" sz="1100" b="1" kern="0" spc="300" dirty="0">
                 <a:solidFill>
                   <a:srgbClr val="6E7BA0"/>
                 </a:solidFill>
@@ -5746,11 +5498,11 @@
           <a:bodyPr wrap="square" lIns="0" tIns="0" rIns="0" bIns="0" rtlCol="0" anchor="ctr"/>
           <a:lstStyle/>
           <a:p>
-            <a:pPr algn="r" indent="0" marL="0">
-              <a:buNone/>
-            </a:pPr>
-            <a:r>
-              <a:rPr lang="en-US" sz="1100" b="1" spc="200" kern="0" dirty="0">
+            <a:pPr marL="0" indent="0" algn="r">
+              <a:buNone/>
+            </a:pPr>
+            <a:r>
+              <a:rPr lang="en-US" sz="1100" b="1" kern="0" spc="200" dirty="0">
                 <a:solidFill>
                   <a:srgbClr val="F2B705"/>
                 </a:solidFill>
@@ -5785,7 +5537,7 @@
           <a:bodyPr wrap="square" lIns="0" tIns="0" rIns="0" bIns="0" rtlCol="0" anchor="t"/>
           <a:lstStyle/>
           <a:p>
-            <a:pPr algn="l" indent="0" marL="0">
+            <a:pPr marL="0" indent="0" algn="l">
               <a:lnSpc>
                 <a:spcPct val="103000"/>
               </a:lnSpc>
@@ -5805,7 +5557,7 @@
             <a:endParaRPr lang="en-US" sz="3400" dirty="0"/>
           </a:p>
           <a:p>
-            <a:pPr algn="l" indent="0" marL="0">
+            <a:pPr marL="0" indent="0" algn="l">
               <a:lnSpc>
                 <a:spcPct val="103000"/>
               </a:lnSpc>
@@ -5847,7 +5599,7 @@
           <a:bodyPr wrap="square" lIns="0" tIns="0" rIns="0" bIns="0" rtlCol="0" anchor="t"/>
           <a:lstStyle/>
           <a:p>
-            <a:pPr algn="l" indent="0" marL="0">
+            <a:pPr marL="0" indent="0" algn="l">
               <a:lnSpc>
                 <a:spcPct val="128000"/>
               </a:lnSpc>
@@ -5934,7 +5686,7 @@
             <a:prstDash val="solid"/>
           </a:ln>
           <a:effectLst>
-            <a:outerShdw sx="100000" sy="100000" kx="0" ky="0" algn="bl" rotWithShape="0" blurRad="177800" dist="76200" dir="5400000">
+            <a:outerShdw blurRad="177800" dist="76200" dir="5400000" algn="bl" rotWithShape="0">
               <a:srgbClr val="000000">
                 <a:alpha val="45000"/>
               </a:srgbClr>
@@ -5963,7 +5715,7 @@
           <a:bodyPr wrap="square" lIns="0" tIns="0" rIns="0" bIns="0" rtlCol="0" anchor="ctr"/>
           <a:lstStyle/>
           <a:p>
-            <a:pPr algn="ctr" indent="0" marL="0">
+            <a:pPr marL="0" indent="0" algn="ctr">
               <a:buNone/>
             </a:pPr>
             <a:r>
@@ -6002,11 +5754,11 @@
           <a:bodyPr wrap="square" lIns="0" tIns="0" rIns="0" bIns="0" rtlCol="0" anchor="ctr"/>
           <a:lstStyle/>
           <a:p>
-            <a:pPr algn="ctr" indent="0" marL="0">
-              <a:buNone/>
-            </a:pPr>
-            <a:r>
-              <a:rPr lang="en-US" sz="1000" b="1" spc="200" kern="0" dirty="0">
+            <a:pPr marL="0" indent="0" algn="ctr">
+              <a:buNone/>
+            </a:pPr>
+            <a:r>
+              <a:rPr lang="en-US" sz="1000" b="1" kern="0" spc="200" dirty="0">
                 <a:solidFill>
                   <a:srgbClr val="6E7BA0"/>
                 </a:solidFill>
@@ -6025,9 +5777,18 @@
   <p:clrMapOvr>
     <a:masterClrMapping/>
   </p:clrMapOvr>
-  <p:transition xmlns:p14="http://schemas.microsoft.com/office/powerpoint/2010/main" p14:dur="700" spd="slow">
-    <p159:morph xmlns:p159="http://schemas.microsoft.com/office/powerpoint/2015/09/main" option="byObject"/>
-  </p:transition>
+  <mc:AlternateContent xmlns:mc="http://schemas.openxmlformats.org/markup-compatibility/2006">
+    <mc:Choice xmlns:p159="http://schemas.microsoft.com/office/powerpoint/2015/09/main" Requires="p159">
+      <p:transition xmlns:p14="http://schemas.microsoft.com/office/powerpoint/2010/main" spd="med" p14:dur="700">
+        <p159:morph option="byObject"/>
+      </p:transition>
+    </mc:Choice>
+    <mc:Fallback>
+      <p:transition spd="med">
+        <p:fade/>
+      </p:transition>
+    </mc:Fallback>
+  </mc:AlternateContent>
 </p:sld>
 </file>
 
@@ -6039,6 +5800,7 @@
         <a:solidFill>
           <a:srgbClr val="0D1225"/>
         </a:solidFill>
+        <a:effectLst/>
       </p:bgPr>
     </p:bg>
     <p:spTree>
@@ -6076,11 +5838,11 @@
           <a:bodyPr wrap="square" lIns="0" tIns="0" rIns="0" bIns="0" rtlCol="0" anchor="ctr"/>
           <a:lstStyle/>
           <a:p>
-            <a:pPr algn="l" indent="0" marL="0">
-              <a:buNone/>
-            </a:pPr>
-            <a:r>
-              <a:rPr lang="en-US" sz="1100" b="1" spc="300" kern="0" dirty="0">
+            <a:pPr marL="0" indent="0" algn="l">
+              <a:buNone/>
+            </a:pPr>
+            <a:r>
+              <a:rPr lang="en-US" sz="1100" b="1" kern="0" spc="300" dirty="0">
                 <a:solidFill>
                   <a:srgbClr val="6E7BA0"/>
                 </a:solidFill>
@@ -6115,11 +5877,11 @@
           <a:bodyPr wrap="square" lIns="0" tIns="0" rIns="0" bIns="0" rtlCol="0" anchor="ctr"/>
           <a:lstStyle/>
           <a:p>
-            <a:pPr algn="r" indent="0" marL="0">
-              <a:buNone/>
-            </a:pPr>
-            <a:r>
-              <a:rPr lang="en-US" sz="1100" b="1" spc="200" kern="0" dirty="0">
+            <a:pPr marL="0" indent="0" algn="r">
+              <a:buNone/>
+            </a:pPr>
+            <a:r>
+              <a:rPr lang="en-US" sz="1100" b="1" kern="0" spc="200" dirty="0">
                 <a:solidFill>
                   <a:srgbClr val="F2B705"/>
                 </a:solidFill>
@@ -6154,7 +5916,7 @@
           <a:bodyPr wrap="square" lIns="0" tIns="0" rIns="0" bIns="0" rtlCol="0" anchor="t"/>
           <a:lstStyle/>
           <a:p>
-            <a:pPr algn="l" indent="0" marL="0">
+            <a:pPr marL="0" indent="0" algn="l">
               <a:lnSpc>
                 <a:spcPct val="103000"/>
               </a:lnSpc>
@@ -6174,7 +5936,7 @@
             <a:endParaRPr lang="en-US" sz="3400" dirty="0"/>
           </a:p>
           <a:p>
-            <a:pPr algn="l" indent="0" marL="0">
+            <a:pPr marL="0" indent="0" algn="l">
               <a:lnSpc>
                 <a:spcPct val="103000"/>
               </a:lnSpc>
@@ -6216,7 +5978,7 @@
           <a:bodyPr wrap="square" lIns="0" tIns="0" rIns="0" bIns="0" rtlCol="0" anchor="t"/>
           <a:lstStyle/>
           <a:p>
-            <a:pPr algn="l" indent="0" marL="0">
+            <a:pPr marL="0" indent="0" algn="l">
               <a:lnSpc>
                 <a:spcPct val="128000"/>
               </a:lnSpc>
@@ -6303,7 +6065,7 @@
             <a:prstDash val="solid"/>
           </a:ln>
           <a:effectLst>
-            <a:outerShdw sx="100000" sy="100000" kx="0" ky="0" algn="bl" rotWithShape="0" blurRad="177800" dist="76200" dir="5400000">
+            <a:outerShdw blurRad="177800" dist="76200" dir="5400000" algn="bl" rotWithShape="0">
               <a:srgbClr val="000000">
                 <a:alpha val="45000"/>
               </a:srgbClr>
@@ -6352,11 +6114,11 @@
           <a:bodyPr wrap="square" lIns="0" tIns="0" rIns="0" bIns="0" rtlCol="0" anchor="ctr"/>
           <a:lstStyle/>
           <a:p>
-            <a:pPr algn="ctr" indent="0" marL="0">
-              <a:buNone/>
-            </a:pPr>
-            <a:r>
-              <a:rPr lang="en-US" sz="1000" b="1" spc="200" kern="0" dirty="0">
+            <a:pPr marL="0" indent="0" algn="ctr">
+              <a:buNone/>
+            </a:pPr>
+            <a:r>
+              <a:rPr lang="en-US" sz="1000" b="1" kern="0" spc="200" dirty="0">
                 <a:solidFill>
                   <a:srgbClr val="6E7BA0"/>
                 </a:solidFill>
@@ -6375,9 +6137,18 @@
   <p:clrMapOvr>
     <a:masterClrMapping/>
   </p:clrMapOvr>
-  <p:transition xmlns:p14="http://schemas.microsoft.com/office/powerpoint/2010/main" p14:dur="700" spd="slow">
-    <p159:morph xmlns:p159="http://schemas.microsoft.com/office/powerpoint/2015/09/main" option="byObject"/>
-  </p:transition>
+  <mc:AlternateContent xmlns:mc="http://schemas.openxmlformats.org/markup-compatibility/2006">
+    <mc:Choice xmlns:p159="http://schemas.microsoft.com/office/powerpoint/2015/09/main" Requires="p159">
+      <p:transition xmlns:p14="http://schemas.microsoft.com/office/powerpoint/2010/main" spd="med" p14:dur="700">
+        <p159:morph option="byObject"/>
+      </p:transition>
+    </mc:Choice>
+    <mc:Fallback>
+      <p:transition spd="med">
+        <p:fade/>
+      </p:transition>
+    </mc:Fallback>
+  </mc:AlternateContent>
 </p:sld>
 </file>
 
@@ -6389,6 +6160,7 @@
         <a:solidFill>
           <a:srgbClr val="0D1225"/>
         </a:solidFill>
+        <a:effectLst/>
       </p:bgPr>
     </p:bg>
     <p:spTree>
@@ -6426,11 +6198,11 @@
           <a:bodyPr wrap="square" lIns="0" tIns="0" rIns="0" bIns="0" rtlCol="0" anchor="ctr"/>
           <a:lstStyle/>
           <a:p>
-            <a:pPr algn="l" indent="0" marL="0">
-              <a:buNone/>
-            </a:pPr>
-            <a:r>
-              <a:rPr lang="en-US" sz="1100" b="1" spc="300" kern="0" dirty="0">
+            <a:pPr marL="0" indent="0" algn="l">
+              <a:buNone/>
+            </a:pPr>
+            <a:r>
+              <a:rPr lang="en-US" sz="1100" b="1" kern="0" spc="300" dirty="0">
                 <a:solidFill>
                   <a:srgbClr val="6E7BA0"/>
                 </a:solidFill>
@@ -6465,11 +6237,11 @@
           <a:bodyPr wrap="square" lIns="0" tIns="0" rIns="0" bIns="0" rtlCol="0" anchor="ctr"/>
           <a:lstStyle/>
           <a:p>
-            <a:pPr algn="r" indent="0" marL="0">
-              <a:buNone/>
-            </a:pPr>
-            <a:r>
-              <a:rPr lang="en-US" sz="1100" b="1" spc="200" kern="0" dirty="0">
+            <a:pPr marL="0" indent="0" algn="r">
+              <a:buNone/>
+            </a:pPr>
+            <a:r>
+              <a:rPr lang="en-US" sz="1100" b="1" kern="0" spc="200" dirty="0">
                 <a:solidFill>
                   <a:srgbClr val="F2B705"/>
                 </a:solidFill>
@@ -6504,7 +6276,7 @@
           <a:bodyPr wrap="square" lIns="0" tIns="0" rIns="0" bIns="0" rtlCol="0" anchor="t"/>
           <a:lstStyle/>
           <a:p>
-            <a:pPr algn="l" indent="0" marL="0">
+            <a:pPr marL="0" indent="0" algn="l">
               <a:lnSpc>
                 <a:spcPct val="103000"/>
               </a:lnSpc>
@@ -6524,7 +6296,7 @@
             <a:endParaRPr lang="en-US" sz="3400" dirty="0"/>
           </a:p>
           <a:p>
-            <a:pPr algn="l" indent="0" marL="0">
+            <a:pPr marL="0" indent="0" algn="l">
               <a:lnSpc>
                 <a:spcPct val="103000"/>
               </a:lnSpc>
@@ -6566,7 +6338,7 @@
           <a:bodyPr wrap="square" lIns="0" tIns="0" rIns="0" bIns="0" rtlCol="0" anchor="t"/>
           <a:lstStyle/>
           <a:p>
-            <a:pPr algn="l" indent="0" marL="0">
+            <a:pPr marL="0" indent="0" algn="l">
               <a:lnSpc>
                 <a:spcPct val="128000"/>
               </a:lnSpc>
@@ -6651,7 +6423,7 @@
             <a:prstDash val="solid"/>
           </a:ln>
           <a:effectLst>
-            <a:outerShdw sx="100000" sy="100000" kx="0" ky="0" algn="bl" rotWithShape="0" blurRad="177800" dist="76200" dir="5400000">
+            <a:outerShdw blurRad="177800" dist="76200" dir="5400000" algn="bl" rotWithShape="0">
               <a:srgbClr val="000000">
                 <a:alpha val="45000"/>
               </a:srgbClr>
@@ -6722,11 +6494,11 @@
           <a:bodyPr wrap="square" lIns="0" tIns="0" rIns="0" bIns="0" rtlCol="0" anchor="ctr"/>
           <a:lstStyle/>
           <a:p>
-            <a:pPr indent="0" marL="0">
-              <a:buNone/>
-            </a:pPr>
-            <a:r>
-              <a:rPr lang="en-US" sz="1050" b="1" spc="60" kern="0" dirty="0">
+            <a:pPr marL="0" indent="0">
+              <a:buNone/>
+            </a:pPr>
+            <a:r>
+              <a:rPr lang="en-US" sz="1050" b="1" kern="0" spc="60" dirty="0">
                 <a:solidFill>
                   <a:srgbClr val="13B8A0"/>
                 </a:solidFill>
@@ -6761,7 +6533,7 @@
           <a:bodyPr wrap="square" lIns="0" tIns="0" rIns="0" bIns="0" rtlCol="0" anchor="ctr"/>
           <a:lstStyle/>
           <a:p>
-            <a:pPr indent="0" marL="0">
+            <a:pPr marL="0" indent="0">
               <a:lnSpc>
                 <a:spcPct val="112000"/>
               </a:lnSpc>
@@ -6825,11 +6597,11 @@
           <a:bodyPr wrap="square" lIns="0" tIns="0" rIns="0" bIns="0" rtlCol="0" anchor="ctr"/>
           <a:lstStyle/>
           <a:p>
-            <a:pPr indent="0" marL="0">
-              <a:buNone/>
-            </a:pPr>
-            <a:r>
-              <a:rPr lang="en-US" sz="1050" b="1" spc="60" kern="0" dirty="0">
+            <a:pPr marL="0" indent="0">
+              <a:buNone/>
+            </a:pPr>
+            <a:r>
+              <a:rPr lang="en-US" sz="1050" b="1" kern="0" spc="60" dirty="0">
                 <a:solidFill>
                   <a:srgbClr val="13B8A0"/>
                 </a:solidFill>
@@ -6864,7 +6636,7 @@
           <a:bodyPr wrap="square" lIns="0" tIns="0" rIns="0" bIns="0" rtlCol="0" anchor="ctr"/>
           <a:lstStyle/>
           <a:p>
-            <a:pPr indent="0" marL="0">
+            <a:pPr marL="0" indent="0">
               <a:lnSpc>
                 <a:spcPct val="112000"/>
               </a:lnSpc>
@@ -6928,11 +6700,11 @@
           <a:bodyPr wrap="square" lIns="0" tIns="0" rIns="0" bIns="0" rtlCol="0" anchor="ctr"/>
           <a:lstStyle/>
           <a:p>
-            <a:pPr indent="0" marL="0">
-              <a:buNone/>
-            </a:pPr>
-            <a:r>
-              <a:rPr lang="en-US" sz="1050" b="1" spc="60" kern="0" dirty="0">
+            <a:pPr marL="0" indent="0">
+              <a:buNone/>
+            </a:pPr>
+            <a:r>
+              <a:rPr lang="en-US" sz="1050" b="1" kern="0" spc="60" dirty="0">
                 <a:solidFill>
                   <a:srgbClr val="13B8A0"/>
                 </a:solidFill>
@@ -6967,7 +6739,7 @@
           <a:bodyPr wrap="square" lIns="0" tIns="0" rIns="0" bIns="0" rtlCol="0" anchor="ctr"/>
           <a:lstStyle/>
           <a:p>
-            <a:pPr indent="0" marL="0">
+            <a:pPr marL="0" indent="0">
               <a:lnSpc>
                 <a:spcPct val="112000"/>
               </a:lnSpc>
@@ -7031,11 +6803,11 @@
           <a:bodyPr wrap="square" lIns="0" tIns="0" rIns="0" bIns="0" rtlCol="0" anchor="ctr"/>
           <a:lstStyle/>
           <a:p>
-            <a:pPr indent="0" marL="0">
-              <a:buNone/>
-            </a:pPr>
-            <a:r>
-              <a:rPr lang="en-US" sz="1050" b="1" spc="60" kern="0" dirty="0">
+            <a:pPr marL="0" indent="0">
+              <a:buNone/>
+            </a:pPr>
+            <a:r>
+              <a:rPr lang="en-US" sz="1050" b="1" kern="0" spc="60" dirty="0">
                 <a:solidFill>
                   <a:srgbClr val="13B8A0"/>
                 </a:solidFill>
@@ -7070,7 +6842,7 @@
           <a:bodyPr wrap="square" lIns="0" tIns="0" rIns="0" bIns="0" rtlCol="0" anchor="ctr"/>
           <a:lstStyle/>
           <a:p>
-            <a:pPr indent="0" marL="0">
+            <a:pPr marL="0" indent="0">
               <a:lnSpc>
                 <a:spcPct val="112000"/>
               </a:lnSpc>
@@ -7096,9 +6868,18 @@
   <p:clrMapOvr>
     <a:masterClrMapping/>
   </p:clrMapOvr>
-  <p:transition xmlns:p14="http://schemas.microsoft.com/office/powerpoint/2010/main" p14:dur="700" spd="slow">
-    <p159:morph xmlns:p159="http://schemas.microsoft.com/office/powerpoint/2015/09/main" option="byObject"/>
-  </p:transition>
+  <mc:AlternateContent xmlns:mc="http://schemas.openxmlformats.org/markup-compatibility/2006">
+    <mc:Choice xmlns:p159="http://schemas.microsoft.com/office/powerpoint/2015/09/main" Requires="p159">
+      <p:transition xmlns:p14="http://schemas.microsoft.com/office/powerpoint/2010/main" spd="med" p14:dur="700">
+        <p159:morph option="byObject"/>
+      </p:transition>
+    </mc:Choice>
+    <mc:Fallback>
+      <p:transition spd="med">
+        <p:fade/>
+      </p:transition>
+    </mc:Fallback>
+  </mc:AlternateContent>
 </p:sld>
 </file>
 
@@ -7110,6 +6891,7 @@
         <a:solidFill>
           <a:srgbClr val="0D1225"/>
         </a:solidFill>
+        <a:effectLst/>
       </p:bgPr>
     </p:bg>
     <p:spTree>
@@ -7147,11 +6929,11 @@
           <a:bodyPr wrap="square" lIns="0" tIns="0" rIns="0" bIns="0" rtlCol="0" anchor="ctr"/>
           <a:lstStyle/>
           <a:p>
-            <a:pPr algn="l" indent="0" marL="0">
-              <a:buNone/>
-            </a:pPr>
-            <a:r>
-              <a:rPr lang="en-US" sz="1100" b="1" spc="300" kern="0" dirty="0">
+            <a:pPr marL="0" indent="0" algn="l">
+              <a:buNone/>
+            </a:pPr>
+            <a:r>
+              <a:rPr lang="en-US" sz="1100" b="1" kern="0" spc="300" dirty="0">
                 <a:solidFill>
                   <a:srgbClr val="6E7BA0"/>
                 </a:solidFill>
@@ -7186,11 +6968,11 @@
           <a:bodyPr wrap="square" lIns="0" tIns="0" rIns="0" bIns="0" rtlCol="0" anchor="ctr"/>
           <a:lstStyle/>
           <a:p>
-            <a:pPr algn="r" indent="0" marL="0">
-              <a:buNone/>
-            </a:pPr>
-            <a:r>
-              <a:rPr lang="en-US" sz="1100" b="1" spc="200" kern="0" dirty="0">
+            <a:pPr marL="0" indent="0" algn="r">
+              <a:buNone/>
+            </a:pPr>
+            <a:r>
+              <a:rPr lang="en-US" sz="1100" b="1" kern="0" spc="200" dirty="0">
                 <a:solidFill>
                   <a:srgbClr val="F2B705"/>
                 </a:solidFill>
@@ -7225,7 +7007,7 @@
           <a:bodyPr wrap="square" lIns="0" tIns="0" rIns="0" bIns="0" rtlCol="0" anchor="t"/>
           <a:lstStyle/>
           <a:p>
-            <a:pPr algn="l" indent="0" marL="0">
+            <a:pPr marL="0" indent="0" algn="l">
               <a:lnSpc>
                 <a:spcPct val="103000"/>
               </a:lnSpc>
@@ -7245,7 +7027,7 @@
             <a:endParaRPr lang="en-US" sz="3400" dirty="0"/>
           </a:p>
           <a:p>
-            <a:pPr algn="l" indent="0" marL="0">
+            <a:pPr marL="0" indent="0" algn="l">
               <a:lnSpc>
                 <a:spcPct val="103000"/>
               </a:lnSpc>
@@ -7287,7 +7069,7 @@
           <a:bodyPr wrap="square" lIns="0" tIns="0" rIns="0" bIns="0" rtlCol="0" anchor="t"/>
           <a:lstStyle/>
           <a:p>
-            <a:pPr algn="l" indent="0" marL="0">
+            <a:pPr marL="0" indent="0" algn="l">
               <a:lnSpc>
                 <a:spcPct val="128000"/>
               </a:lnSpc>
@@ -7367,7 +7149,7 @@
           </a:solidFill>
           <a:ln/>
           <a:effectLst>
-            <a:outerShdw sx="100000" sy="100000" kx="0" ky="0" algn="bl" rotWithShape="0" blurRad="177800" dist="76200" dir="5400000">
+            <a:outerShdw blurRad="177800" dist="76200" dir="5400000" algn="bl" rotWithShape="0">
               <a:srgbClr val="000000">
                 <a:alpha val="45000"/>
               </a:srgbClr>
@@ -7418,11 +7200,11 @@
           <a:bodyPr wrap="square" lIns="0" tIns="0" rIns="0" bIns="0" rtlCol="0" anchor="ctr"/>
           <a:lstStyle/>
           <a:p>
-            <a:pPr indent="0" marL="0">
-              <a:buNone/>
-            </a:pPr>
-            <a:r>
-              <a:rPr lang="en-US" sz="1050" b="1" spc="60" kern="0" dirty="0">
+            <a:pPr marL="0" indent="0">
+              <a:buNone/>
+            </a:pPr>
+            <a:r>
+              <a:rPr lang="en-US" sz="1050" b="1" kern="0" spc="60" dirty="0">
                 <a:solidFill>
                   <a:srgbClr val="3B5BDB"/>
                 </a:solidFill>
@@ -7457,7 +7239,7 @@
           <a:bodyPr wrap="square" lIns="0" tIns="0" rIns="0" bIns="0" rtlCol="0" anchor="ctr"/>
           <a:lstStyle/>
           <a:p>
-            <a:pPr indent="0" marL="0">
+            <a:pPr marL="0" indent="0">
               <a:lnSpc>
                 <a:spcPct val="112000"/>
               </a:lnSpc>
@@ -7521,11 +7303,11 @@
           <a:bodyPr wrap="square" lIns="0" tIns="0" rIns="0" bIns="0" rtlCol="0" anchor="ctr"/>
           <a:lstStyle/>
           <a:p>
-            <a:pPr indent="0" marL="0">
-              <a:buNone/>
-            </a:pPr>
-            <a:r>
-              <a:rPr lang="en-US" sz="1050" b="1" spc="60" kern="0" dirty="0">
+            <a:pPr marL="0" indent="0">
+              <a:buNone/>
+            </a:pPr>
+            <a:r>
+              <a:rPr lang="en-US" sz="1050" b="1" kern="0" spc="60" dirty="0">
                 <a:solidFill>
                   <a:srgbClr val="3B5BDB"/>
                 </a:solidFill>
@@ -7560,7 +7342,7 @@
           <a:bodyPr wrap="square" lIns="0" tIns="0" rIns="0" bIns="0" rtlCol="0" anchor="ctr"/>
           <a:lstStyle/>
           <a:p>
-            <a:pPr indent="0" marL="0">
+            <a:pPr marL="0" indent="0">
               <a:lnSpc>
                 <a:spcPct val="112000"/>
               </a:lnSpc>
@@ -7624,11 +7406,11 @@
           <a:bodyPr wrap="square" lIns="0" tIns="0" rIns="0" bIns="0" rtlCol="0" anchor="ctr"/>
           <a:lstStyle/>
           <a:p>
-            <a:pPr indent="0" marL="0">
-              <a:buNone/>
-            </a:pPr>
-            <a:r>
-              <a:rPr lang="en-US" sz="1050" b="1" spc="60" kern="0" dirty="0">
+            <a:pPr marL="0" indent="0">
+              <a:buNone/>
+            </a:pPr>
+            <a:r>
+              <a:rPr lang="en-US" sz="1050" b="1" kern="0" spc="60" dirty="0">
                 <a:solidFill>
                   <a:srgbClr val="3B5BDB"/>
                 </a:solidFill>
@@ -7663,7 +7445,7 @@
           <a:bodyPr wrap="square" lIns="0" tIns="0" rIns="0" bIns="0" rtlCol="0" anchor="ctr"/>
           <a:lstStyle/>
           <a:p>
-            <a:pPr indent="0" marL="0">
+            <a:pPr marL="0" indent="0">
               <a:lnSpc>
                 <a:spcPct val="112000"/>
               </a:lnSpc>
@@ -7689,9 +7471,18 @@
   <p:clrMapOvr>
     <a:masterClrMapping/>
   </p:clrMapOvr>
-  <p:transition xmlns:p14="http://schemas.microsoft.com/office/powerpoint/2010/main" p14:dur="700" spd="slow">
-    <p159:morph xmlns:p159="http://schemas.microsoft.com/office/powerpoint/2015/09/main" option="byObject"/>
-  </p:transition>
+  <mc:AlternateContent xmlns:mc="http://schemas.openxmlformats.org/markup-compatibility/2006">
+    <mc:Choice xmlns:p159="http://schemas.microsoft.com/office/powerpoint/2015/09/main" Requires="p159">
+      <p:transition xmlns:p14="http://schemas.microsoft.com/office/powerpoint/2010/main" spd="med" p14:dur="700">
+        <p159:morph option="byObject"/>
+      </p:transition>
+    </mc:Choice>
+    <mc:Fallback>
+      <p:transition spd="med">
+        <p:fade/>
+      </p:transition>
+    </mc:Fallback>
+  </mc:AlternateContent>
 </p:sld>
 </file>
 
@@ -7703,6 +7494,7 @@
         <a:solidFill>
           <a:srgbClr val="0D1225"/>
         </a:solidFill>
+        <a:effectLst/>
       </p:bgPr>
     </p:bg>
     <p:spTree>
@@ -7740,11 +7532,11 @@
           <a:bodyPr wrap="square" lIns="0" tIns="0" rIns="0" bIns="0" rtlCol="0" anchor="ctr"/>
           <a:lstStyle/>
           <a:p>
-            <a:pPr algn="l" indent="0" marL="0">
-              <a:buNone/>
-            </a:pPr>
-            <a:r>
-              <a:rPr lang="en-US" sz="1100" b="1" spc="300" kern="0" dirty="0">
+            <a:pPr marL="0" indent="0" algn="l">
+              <a:buNone/>
+            </a:pPr>
+            <a:r>
+              <a:rPr lang="en-US" sz="1100" b="1" kern="0" spc="300" dirty="0">
                 <a:solidFill>
                   <a:srgbClr val="6E7BA0"/>
                 </a:solidFill>
@@ -7779,11 +7571,11 @@
           <a:bodyPr wrap="square" lIns="0" tIns="0" rIns="0" bIns="0" rtlCol="0" anchor="ctr"/>
           <a:lstStyle/>
           <a:p>
-            <a:pPr algn="r" indent="0" marL="0">
-              <a:buNone/>
-            </a:pPr>
-            <a:r>
-              <a:rPr lang="en-US" sz="1100" b="1" spc="200" kern="0" dirty="0">
+            <a:pPr marL="0" indent="0" algn="r">
+              <a:buNone/>
+            </a:pPr>
+            <a:r>
+              <a:rPr lang="en-US" sz="1100" b="1" kern="0" spc="200" dirty="0">
                 <a:solidFill>
                   <a:srgbClr val="F2B705"/>
                 </a:solidFill>
@@ -7818,7 +7610,7 @@
           <a:bodyPr wrap="square" lIns="0" tIns="0" rIns="0" bIns="0" rtlCol="0" anchor="t"/>
           <a:lstStyle/>
           <a:p>
-            <a:pPr algn="l" indent="0" marL="0">
+            <a:pPr marL="0" indent="0" algn="l">
               <a:lnSpc>
                 <a:spcPct val="103000"/>
               </a:lnSpc>
@@ -7838,7 +7630,7 @@
             <a:endParaRPr lang="en-US" sz="3400" dirty="0"/>
           </a:p>
           <a:p>
-            <a:pPr algn="l" indent="0" marL="0">
+            <a:pPr marL="0" indent="0" algn="l">
               <a:lnSpc>
                 <a:spcPct val="103000"/>
               </a:lnSpc>
@@ -7880,7 +7672,7 @@
           <a:bodyPr wrap="square" lIns="0" tIns="0" rIns="0" bIns="0" rtlCol="0" anchor="t"/>
           <a:lstStyle/>
           <a:p>
-            <a:pPr algn="l" indent="0" marL="0">
+            <a:pPr marL="0" indent="0" algn="l">
               <a:lnSpc>
                 <a:spcPct val="128000"/>
               </a:lnSpc>
@@ -7960,7 +7752,7 @@
           </a:solidFill>
           <a:ln/>
           <a:effectLst>
-            <a:outerShdw sx="100000" sy="100000" kx="0" ky="0" algn="bl" rotWithShape="0" blurRad="177800" dist="76200" dir="5400000">
+            <a:outerShdw blurRad="177800" dist="76200" dir="5400000" algn="bl" rotWithShape="0">
               <a:srgbClr val="000000">
                 <a:alpha val="45000"/>
               </a:srgbClr>
@@ -8051,11 +7843,11 @@
           <a:bodyPr wrap="square" lIns="0" tIns="0" rIns="0" bIns="0" rtlCol="0" anchor="ctr"/>
           <a:lstStyle/>
           <a:p>
-            <a:pPr indent="0" marL="0">
-              <a:buNone/>
-            </a:pPr>
-            <a:r>
-              <a:rPr lang="en-US" sz="1100" b="1" spc="60" kern="0" dirty="0">
+            <a:pPr marL="0" indent="0">
+              <a:buNone/>
+            </a:pPr>
+            <a:r>
+              <a:rPr lang="en-US" sz="1100" b="1" kern="0" spc="60" dirty="0">
                 <a:solidFill>
                   <a:srgbClr val="F2B705"/>
                 </a:solidFill>
@@ -8090,7 +7882,7 @@
           <a:bodyPr wrap="square" lIns="0" tIns="0" rIns="0" bIns="0" rtlCol="0" anchor="ctr"/>
           <a:lstStyle/>
           <a:p>
-            <a:pPr indent="0" marL="0">
+            <a:pPr marL="0" indent="0">
               <a:lnSpc>
                 <a:spcPct val="112000"/>
               </a:lnSpc>
@@ -8154,11 +7946,11 @@
           <a:bodyPr wrap="square" lIns="0" tIns="0" rIns="0" bIns="0" rtlCol="0" anchor="ctr"/>
           <a:lstStyle/>
           <a:p>
-            <a:pPr indent="0" marL="0">
-              <a:buNone/>
-            </a:pPr>
-            <a:r>
-              <a:rPr lang="en-US" sz="1100" b="1" spc="60" kern="0" dirty="0">
+            <a:pPr marL="0" indent="0">
+              <a:buNone/>
+            </a:pPr>
+            <a:r>
+              <a:rPr lang="en-US" sz="1100" b="1" kern="0" spc="60" dirty="0">
                 <a:solidFill>
                   <a:srgbClr val="F2B705"/>
                 </a:solidFill>
@@ -8193,7 +7985,7 @@
           <a:bodyPr wrap="square" lIns="0" tIns="0" rIns="0" bIns="0" rtlCol="0" anchor="ctr"/>
           <a:lstStyle/>
           <a:p>
-            <a:pPr indent="0" marL="0">
+            <a:pPr marL="0" indent="0">
               <a:lnSpc>
                 <a:spcPct val="112000"/>
               </a:lnSpc>
@@ -8257,11 +8049,11 @@
           <a:bodyPr wrap="square" lIns="0" tIns="0" rIns="0" bIns="0" rtlCol="0" anchor="ctr"/>
           <a:lstStyle/>
           <a:p>
-            <a:pPr indent="0" marL="0">
-              <a:buNone/>
-            </a:pPr>
-            <a:r>
-              <a:rPr lang="en-US" sz="1100" b="1" spc="60" kern="0" dirty="0">
+            <a:pPr marL="0" indent="0">
+              <a:buNone/>
+            </a:pPr>
+            <a:r>
+              <a:rPr lang="en-US" sz="1100" b="1" kern="0" spc="60" dirty="0">
                 <a:solidFill>
                   <a:srgbClr val="F2B705"/>
                 </a:solidFill>
@@ -8296,7 +8088,7 @@
           <a:bodyPr wrap="square" lIns="0" tIns="0" rIns="0" bIns="0" rtlCol="0" anchor="ctr"/>
           <a:lstStyle/>
           <a:p>
-            <a:pPr indent="0" marL="0">
+            <a:pPr marL="0" indent="0">
               <a:lnSpc>
                 <a:spcPct val="112000"/>
               </a:lnSpc>
@@ -8360,11 +8152,11 @@
           <a:bodyPr wrap="square" lIns="0" tIns="0" rIns="0" bIns="0" rtlCol="0" anchor="ctr"/>
           <a:lstStyle/>
           <a:p>
-            <a:pPr indent="0" marL="0">
-              <a:buNone/>
-            </a:pPr>
-            <a:r>
-              <a:rPr lang="en-US" sz="1100" b="1" spc="60" kern="0" dirty="0">
+            <a:pPr marL="0" indent="0">
+              <a:buNone/>
+            </a:pPr>
+            <a:r>
+              <a:rPr lang="en-US" sz="1100" b="1" kern="0" spc="60" dirty="0">
                 <a:solidFill>
                   <a:srgbClr val="F2B705"/>
                 </a:solidFill>
@@ -8399,7 +8191,7 @@
           <a:bodyPr wrap="square" lIns="0" tIns="0" rIns="0" bIns="0" rtlCol="0" anchor="ctr"/>
           <a:lstStyle/>
           <a:p>
-            <a:pPr indent="0" marL="0">
+            <a:pPr marL="0" indent="0">
               <a:lnSpc>
                 <a:spcPct val="112000"/>
               </a:lnSpc>
@@ -8425,9 +8217,18 @@
   <p:clrMapOvr>
     <a:masterClrMapping/>
   </p:clrMapOvr>
-  <p:transition xmlns:p14="http://schemas.microsoft.com/office/powerpoint/2010/main" p14:dur="700" spd="slow">
-    <p159:morph xmlns:p159="http://schemas.microsoft.com/office/powerpoint/2015/09/main" option="byObject"/>
-  </p:transition>
+  <mc:AlternateContent xmlns:mc="http://schemas.openxmlformats.org/markup-compatibility/2006">
+    <mc:Choice xmlns:p159="http://schemas.microsoft.com/office/powerpoint/2015/09/main" Requires="p159">
+      <p:transition xmlns:p14="http://schemas.microsoft.com/office/powerpoint/2010/main" spd="med" p14:dur="700">
+        <p159:morph option="byObject"/>
+      </p:transition>
+    </mc:Choice>
+    <mc:Fallback>
+      <p:transition spd="med">
+        <p:fade/>
+      </p:transition>
+    </mc:Fallback>
+  </mc:AlternateContent>
 </p:sld>
 </file>
 
@@ -8439,6 +8240,7 @@
         <a:solidFill>
           <a:srgbClr val="0D1225"/>
         </a:solidFill>
+        <a:effectLst/>
       </p:bgPr>
     </p:bg>
     <p:spTree>
@@ -8476,11 +8278,11 @@
           <a:bodyPr wrap="square" lIns="0" tIns="0" rIns="0" bIns="0" rtlCol="0" anchor="ctr"/>
           <a:lstStyle/>
           <a:p>
-            <a:pPr algn="l" indent="0" marL="0">
-              <a:buNone/>
-            </a:pPr>
-            <a:r>
-              <a:rPr lang="en-US" sz="1100" b="1" spc="300" kern="0" dirty="0">
+            <a:pPr marL="0" indent="0" algn="l">
+              <a:buNone/>
+            </a:pPr>
+            <a:r>
+              <a:rPr lang="en-US" sz="1100" b="1" kern="0" spc="300" dirty="0">
                 <a:solidFill>
                   <a:srgbClr val="6E7BA0"/>
                 </a:solidFill>
@@ -8515,11 +8317,11 @@
           <a:bodyPr wrap="square" lIns="0" tIns="0" rIns="0" bIns="0" rtlCol="0" anchor="ctr"/>
           <a:lstStyle/>
           <a:p>
-            <a:pPr algn="r" indent="0" marL="0">
-              <a:buNone/>
-            </a:pPr>
-            <a:r>
-              <a:rPr lang="en-US" sz="1100" b="1" spc="200" kern="0" dirty="0">
+            <a:pPr marL="0" indent="0" algn="r">
+              <a:buNone/>
+            </a:pPr>
+            <a:r>
+              <a:rPr lang="en-US" sz="1100" b="1" kern="0" spc="200" dirty="0">
                 <a:solidFill>
                   <a:srgbClr val="F2B705"/>
                 </a:solidFill>
@@ -8554,7 +8356,7 @@
           <a:bodyPr wrap="square" lIns="0" tIns="0" rIns="0" bIns="0" rtlCol="0" anchor="t"/>
           <a:lstStyle/>
           <a:p>
-            <a:pPr algn="l" indent="0" marL="0">
+            <a:pPr marL="0" indent="0" algn="l">
               <a:lnSpc>
                 <a:spcPct val="103000"/>
               </a:lnSpc>
@@ -8574,7 +8376,7 @@
             <a:endParaRPr lang="en-US" sz="3400" dirty="0"/>
           </a:p>
           <a:p>
-            <a:pPr algn="l" indent="0" marL="0">
+            <a:pPr marL="0" indent="0" algn="l">
               <a:lnSpc>
                 <a:spcPct val="103000"/>
               </a:lnSpc>
@@ -8616,7 +8418,7 @@
           <a:bodyPr wrap="square" lIns="0" tIns="0" rIns="0" bIns="0" rtlCol="0" anchor="t"/>
           <a:lstStyle/>
           <a:p>
-            <a:pPr algn="l" indent="0" marL="0">
+            <a:pPr marL="0" indent="0" algn="l">
               <a:lnSpc>
                 <a:spcPct val="128000"/>
               </a:lnSpc>
@@ -9126,7 +8928,7 @@
           <a:bodyPr wrap="square" lIns="0" tIns="0" rIns="0" bIns="0" rtlCol="0" anchor="ctr"/>
           <a:lstStyle/>
           <a:p>
-            <a:pPr indent="0" marL="0">
+            <a:pPr marL="0" indent="0">
               <a:buNone/>
             </a:pPr>
             <a:r>
@@ -9165,7 +8967,7 @@
           <a:bodyPr wrap="square" lIns="0" tIns="0" rIns="0" bIns="0" rtlCol="0" anchor="ctr"/>
           <a:lstStyle/>
           <a:p>
-            <a:pPr algn="r" indent="0" marL="0">
+            <a:pPr marL="0" indent="0" algn="r">
               <a:buNone/>
             </a:pPr>
             <a:r>
@@ -9188,9 +8990,18 @@
   <p:clrMapOvr>
     <a:masterClrMapping/>
   </p:clrMapOvr>
-  <p:transition xmlns:p14="http://schemas.microsoft.com/office/powerpoint/2010/main" p14:dur="700" spd="slow">
-    <p159:morph xmlns:p159="http://schemas.microsoft.com/office/powerpoint/2015/09/main" option="byObject"/>
-  </p:transition>
+  <mc:AlternateContent xmlns:mc="http://schemas.openxmlformats.org/markup-compatibility/2006">
+    <mc:Choice xmlns:p159="http://schemas.microsoft.com/office/powerpoint/2015/09/main" Requires="p159">
+      <p:transition xmlns:p14="http://schemas.microsoft.com/office/powerpoint/2010/main" spd="med" p14:dur="700">
+        <p159:morph option="byObject"/>
+      </p:transition>
+    </mc:Choice>
+    <mc:Fallback>
+      <p:transition spd="med">
+        <p:fade/>
+      </p:transition>
+    </mc:Fallback>
+  </mc:AlternateContent>
 </p:sld>
 </file>
 
@@ -9202,6 +9013,7 @@
         <a:solidFill>
           <a:srgbClr val="0D1225"/>
         </a:solidFill>
+        <a:effectLst/>
       </p:bgPr>
     </p:bg>
     <p:spTree>
@@ -9239,11 +9051,11 @@
           <a:bodyPr wrap="square" lIns="0" tIns="0" rIns="0" bIns="0" rtlCol="0" anchor="ctr"/>
           <a:lstStyle/>
           <a:p>
-            <a:pPr algn="l" indent="0" marL="0">
-              <a:buNone/>
-            </a:pPr>
-            <a:r>
-              <a:rPr lang="en-US" sz="1100" b="1" spc="300" kern="0" dirty="0">
+            <a:pPr marL="0" indent="0" algn="l">
+              <a:buNone/>
+            </a:pPr>
+            <a:r>
+              <a:rPr lang="en-US" sz="1100" b="1" kern="0" spc="300" dirty="0">
                 <a:solidFill>
                   <a:srgbClr val="6E7BA0"/>
                 </a:solidFill>
@@ -9278,11 +9090,11 @@
           <a:bodyPr wrap="square" lIns="0" tIns="0" rIns="0" bIns="0" rtlCol="0" anchor="ctr"/>
           <a:lstStyle/>
           <a:p>
-            <a:pPr algn="r" indent="0" marL="0">
-              <a:buNone/>
-            </a:pPr>
-            <a:r>
-              <a:rPr lang="en-US" sz="1100" b="1" spc="200" kern="0" dirty="0">
+            <a:pPr marL="0" indent="0" algn="r">
+              <a:buNone/>
+            </a:pPr>
+            <a:r>
+              <a:rPr lang="en-US" sz="1100" b="1" kern="0" spc="200" dirty="0">
                 <a:solidFill>
                   <a:srgbClr val="F2B705"/>
                 </a:solidFill>
@@ -9317,7 +9129,7 @@
           <a:bodyPr wrap="square" lIns="0" tIns="0" rIns="0" bIns="0" rtlCol="0" anchor="t"/>
           <a:lstStyle/>
           <a:p>
-            <a:pPr algn="l" indent="0" marL="0">
+            <a:pPr marL="0" indent="0" algn="l">
               <a:lnSpc>
                 <a:spcPct val="103000"/>
               </a:lnSpc>
@@ -9359,7 +9171,7 @@
           <a:bodyPr wrap="square" lIns="0" tIns="0" rIns="0" bIns="0" rtlCol="0" anchor="t"/>
           <a:lstStyle/>
           <a:p>
-            <a:pPr algn="l" indent="0" marL="0">
+            <a:pPr marL="0" indent="0" algn="l">
               <a:lnSpc>
                 <a:spcPct val="128000"/>
               </a:lnSpc>
@@ -9443,7 +9255,7 @@
             <a:prstDash val="dash"/>
           </a:ln>
           <a:effectLst>
-            <a:outerShdw sx="100000" sy="100000" kx="0" ky="0" algn="bl" rotWithShape="0" blurRad="177800" dist="76200" dir="5400000">
+            <a:outerShdw blurRad="177800" dist="76200" dir="5400000" algn="bl" rotWithShape="0">
               <a:srgbClr val="000000">
                 <a:alpha val="45000"/>
               </a:srgbClr>
@@ -9472,11 +9284,11 @@
           <a:bodyPr wrap="square" lIns="0" tIns="0" rIns="0" bIns="0" rtlCol="0" anchor="ctr"/>
           <a:lstStyle/>
           <a:p>
-            <a:pPr algn="ctr" indent="0" marL="0">
-              <a:buNone/>
-            </a:pPr>
-            <a:r>
-              <a:rPr lang="en-US" sz="1050" b="1" spc="150" kern="0" dirty="0">
+            <a:pPr marL="0" indent="0" algn="ctr">
+              <a:buNone/>
+            </a:pPr>
+            <a:r>
+              <a:rPr lang="en-US" sz="1050" b="1" kern="0" spc="150" dirty="0">
                 <a:solidFill>
                   <a:srgbClr val="8792AD"/>
                 </a:solidFill>
@@ -9495,9 +9307,18 @@
   <p:clrMapOvr>
     <a:masterClrMapping/>
   </p:clrMapOvr>
-  <p:transition xmlns:p14="http://schemas.microsoft.com/office/powerpoint/2010/main" p14:dur="700" spd="slow">
-    <p159:morph xmlns:p159="http://schemas.microsoft.com/office/powerpoint/2015/09/main" option="byObject"/>
-  </p:transition>
+  <mc:AlternateContent xmlns:mc="http://schemas.openxmlformats.org/markup-compatibility/2006">
+    <mc:Choice xmlns:p159="http://schemas.microsoft.com/office/powerpoint/2015/09/main" Requires="p159">
+      <p:transition xmlns:p14="http://schemas.microsoft.com/office/powerpoint/2010/main" spd="med" p14:dur="700">
+        <p159:morph option="byObject"/>
+      </p:transition>
+    </mc:Choice>
+    <mc:Fallback>
+      <p:transition spd="med">
+        <p:fade/>
+      </p:transition>
+    </mc:Fallback>
+  </mc:AlternateContent>
 </p:sld>
 </file>
 
@@ -9509,6 +9330,7 @@
         <a:solidFill>
           <a:srgbClr val="0D1225"/>
         </a:solidFill>
+        <a:effectLst/>
       </p:bgPr>
     </p:bg>
     <p:spTree>
@@ -9546,11 +9368,11 @@
           <a:bodyPr wrap="square" lIns="0" tIns="0" rIns="0" bIns="0" rtlCol="0" anchor="ctr"/>
           <a:lstStyle/>
           <a:p>
-            <a:pPr algn="l" indent="0" marL="0">
-              <a:buNone/>
-            </a:pPr>
-            <a:r>
-              <a:rPr lang="en-US" sz="1100" b="1" spc="300" kern="0" dirty="0">
+            <a:pPr marL="0" indent="0" algn="l">
+              <a:buNone/>
+            </a:pPr>
+            <a:r>
+              <a:rPr lang="en-US" sz="1100" b="1" kern="0" spc="300" dirty="0">
                 <a:solidFill>
                   <a:srgbClr val="6E7BA0"/>
                 </a:solidFill>
@@ -9585,11 +9407,11 @@
           <a:bodyPr wrap="square" lIns="0" tIns="0" rIns="0" bIns="0" rtlCol="0" anchor="ctr"/>
           <a:lstStyle/>
           <a:p>
-            <a:pPr algn="r" indent="0" marL="0">
-              <a:buNone/>
-            </a:pPr>
-            <a:r>
-              <a:rPr lang="en-US" sz="1100" b="1" spc="200" kern="0" dirty="0">
+            <a:pPr marL="0" indent="0" algn="r">
+              <a:buNone/>
+            </a:pPr>
+            <a:r>
+              <a:rPr lang="en-US" sz="1100" b="1" kern="0" spc="200" dirty="0">
                 <a:solidFill>
                   <a:srgbClr val="F2B705"/>
                 </a:solidFill>
@@ -9624,7 +9446,7 @@
           <a:bodyPr wrap="square" lIns="0" tIns="0" rIns="0" bIns="0" rtlCol="0" anchor="t"/>
           <a:lstStyle/>
           <a:p>
-            <a:pPr algn="l" indent="0" marL="0">
+            <a:pPr marL="0" indent="0" algn="l">
               <a:lnSpc>
                 <a:spcPct val="103000"/>
               </a:lnSpc>
@@ -9644,7 +9466,7 @@
             <a:endParaRPr lang="en-US" sz="3400" dirty="0"/>
           </a:p>
           <a:p>
-            <a:pPr algn="l" indent="0" marL="0">
+            <a:pPr marL="0" indent="0" algn="l">
               <a:lnSpc>
                 <a:spcPct val="103000"/>
               </a:lnSpc>
@@ -9686,7 +9508,7 @@
           <a:bodyPr wrap="square" lIns="0" tIns="0" rIns="0" bIns="0" rtlCol="0" anchor="t"/>
           <a:lstStyle/>
           <a:p>
-            <a:pPr algn="l" indent="0" marL="0">
+            <a:pPr marL="0" indent="0" algn="l">
               <a:lnSpc>
                 <a:spcPct val="128000"/>
               </a:lnSpc>
@@ -9766,7 +9588,7 @@
           </a:solidFill>
           <a:ln/>
           <a:effectLst>
-            <a:outerShdw sx="100000" sy="100000" kx="0" ky="0" algn="bl" rotWithShape="0" blurRad="177800" dist="76200" dir="5400000">
+            <a:outerShdw blurRad="177800" dist="76200" dir="5400000" algn="bl" rotWithShape="0">
               <a:srgbClr val="000000">
                 <a:alpha val="45000"/>
               </a:srgbClr>
@@ -9795,7 +9617,7 @@
           <a:bodyPr wrap="square" lIns="0" tIns="0" rIns="0" bIns="0" rtlCol="0" anchor="ctr"/>
           <a:lstStyle/>
           <a:p>
-            <a:pPr algn="ctr" indent="0" marL="0">
+            <a:pPr marL="0" indent="0" algn="ctr">
               <a:buNone/>
             </a:pPr>
             <a:r>
@@ -9834,11 +9656,11 @@
           <a:bodyPr wrap="square" lIns="0" tIns="0" rIns="0" bIns="0" rtlCol="0" anchor="ctr"/>
           <a:lstStyle/>
           <a:p>
-            <a:pPr algn="ctr" indent="0" marL="0">
-              <a:buNone/>
-            </a:pPr>
-            <a:r>
-              <a:rPr lang="en-US" sz="1000" b="1" spc="120" kern="0" dirty="0">
+            <a:pPr marL="0" indent="0" algn="ctr">
+              <a:buNone/>
+            </a:pPr>
+            <a:r>
+              <a:rPr lang="en-US" sz="1000" b="1" kern="0" spc="120" dirty="0">
                 <a:solidFill>
                   <a:srgbClr val="F2B705"/>
                 </a:solidFill>
@@ -9895,11 +9717,11 @@
           <a:bodyPr wrap="square" lIns="0" tIns="0" rIns="0" bIns="0" rtlCol="0" anchor="ctr"/>
           <a:lstStyle/>
           <a:p>
-            <a:pPr indent="0" marL="0">
-              <a:buNone/>
-            </a:pPr>
-            <a:r>
-              <a:rPr lang="en-US" sz="1050" b="1" spc="60" kern="0" dirty="0">
+            <a:pPr marL="0" indent="0">
+              <a:buNone/>
+            </a:pPr>
+            <a:r>
+              <a:rPr lang="en-US" sz="1050" b="1" kern="0" spc="60" dirty="0">
                 <a:solidFill>
                   <a:srgbClr val="F2B705"/>
                 </a:solidFill>
@@ -9934,7 +9756,7 @@
           <a:bodyPr wrap="square" lIns="0" tIns="0" rIns="0" bIns="0" rtlCol="0" anchor="ctr"/>
           <a:lstStyle/>
           <a:p>
-            <a:pPr indent="0" marL="0">
+            <a:pPr marL="0" indent="0">
               <a:lnSpc>
                 <a:spcPct val="112000"/>
               </a:lnSpc>
@@ -9998,11 +9820,11 @@
           <a:bodyPr wrap="square" lIns="0" tIns="0" rIns="0" bIns="0" rtlCol="0" anchor="ctr"/>
           <a:lstStyle/>
           <a:p>
-            <a:pPr indent="0" marL="0">
-              <a:buNone/>
-            </a:pPr>
-            <a:r>
-              <a:rPr lang="en-US" sz="1050" b="1" spc="60" kern="0" dirty="0">
+            <a:pPr marL="0" indent="0">
+              <a:buNone/>
+            </a:pPr>
+            <a:r>
+              <a:rPr lang="en-US" sz="1050" b="1" kern="0" spc="60" dirty="0">
                 <a:solidFill>
                   <a:srgbClr val="F2B705"/>
                 </a:solidFill>
@@ -10037,7 +9859,7 @@
           <a:bodyPr wrap="square" lIns="0" tIns="0" rIns="0" bIns="0" rtlCol="0" anchor="ctr"/>
           <a:lstStyle/>
           <a:p>
-            <a:pPr indent="0" marL="0">
+            <a:pPr marL="0" indent="0">
               <a:lnSpc>
                 <a:spcPct val="112000"/>
               </a:lnSpc>
@@ -10101,11 +9923,11 @@
           <a:bodyPr wrap="square" lIns="0" tIns="0" rIns="0" bIns="0" rtlCol="0" anchor="ctr"/>
           <a:lstStyle/>
           <a:p>
-            <a:pPr indent="0" marL="0">
-              <a:buNone/>
-            </a:pPr>
-            <a:r>
-              <a:rPr lang="en-US" sz="1050" b="1" spc="60" kern="0" dirty="0">
+            <a:pPr marL="0" indent="0">
+              <a:buNone/>
+            </a:pPr>
+            <a:r>
+              <a:rPr lang="en-US" sz="1050" b="1" kern="0" spc="60" dirty="0">
                 <a:solidFill>
                   <a:srgbClr val="F2B705"/>
                 </a:solidFill>
@@ -10140,7 +9962,7 @@
           <a:bodyPr wrap="square" lIns="0" tIns="0" rIns="0" bIns="0" rtlCol="0" anchor="ctr"/>
           <a:lstStyle/>
           <a:p>
-            <a:pPr indent="0" marL="0">
+            <a:pPr marL="0" indent="0">
               <a:lnSpc>
                 <a:spcPct val="112000"/>
               </a:lnSpc>
@@ -10166,9 +9988,18 @@
   <p:clrMapOvr>
     <a:masterClrMapping/>
   </p:clrMapOvr>
-  <p:transition xmlns:p14="http://schemas.microsoft.com/office/powerpoint/2010/main" p14:dur="700" spd="slow">
-    <p159:morph xmlns:p159="http://schemas.microsoft.com/office/powerpoint/2015/09/main" option="byObject"/>
-  </p:transition>
+  <mc:AlternateContent xmlns:mc="http://schemas.openxmlformats.org/markup-compatibility/2006">
+    <mc:Choice xmlns:p159="http://schemas.microsoft.com/office/powerpoint/2015/09/main" Requires="p159">
+      <p:transition xmlns:p14="http://schemas.microsoft.com/office/powerpoint/2010/main" spd="med" p14:dur="700">
+        <p159:morph option="byObject"/>
+      </p:transition>
+    </mc:Choice>
+    <mc:Fallback>
+      <p:transition spd="med">
+        <p:fade/>
+      </p:transition>
+    </mc:Fallback>
+  </mc:AlternateContent>
 </p:sld>
 </file>
 
@@ -10180,6 +10011,7 @@
         <a:solidFill>
           <a:srgbClr val="0D1225"/>
         </a:solidFill>
+        <a:effectLst/>
       </p:bgPr>
     </p:bg>
     <p:spTree>
@@ -10217,11 +10049,11 @@
           <a:bodyPr wrap="square" lIns="0" tIns="0" rIns="0" bIns="0" rtlCol="0" anchor="ctr"/>
           <a:lstStyle/>
           <a:p>
-            <a:pPr algn="l" indent="0" marL="0">
-              <a:buNone/>
-            </a:pPr>
-            <a:r>
-              <a:rPr lang="en-US" sz="1100" b="1" spc="300" kern="0" dirty="0">
+            <a:pPr marL="0" indent="0" algn="l">
+              <a:buNone/>
+            </a:pPr>
+            <a:r>
+              <a:rPr lang="en-US" sz="1100" b="1" kern="0" spc="300" dirty="0">
                 <a:solidFill>
                   <a:srgbClr val="6E7BA0"/>
                 </a:solidFill>
@@ -10256,11 +10088,11 @@
           <a:bodyPr wrap="square" lIns="0" tIns="0" rIns="0" bIns="0" rtlCol="0" anchor="ctr"/>
           <a:lstStyle/>
           <a:p>
-            <a:pPr algn="r" indent="0" marL="0">
-              <a:buNone/>
-            </a:pPr>
-            <a:r>
-              <a:rPr lang="en-US" sz="1100" b="1" spc="200" kern="0" dirty="0">
+            <a:pPr marL="0" indent="0" algn="r">
+              <a:buNone/>
+            </a:pPr>
+            <a:r>
+              <a:rPr lang="en-US" sz="1100" b="1" kern="0" spc="200" dirty="0">
                 <a:solidFill>
                   <a:srgbClr val="F2B705"/>
                 </a:solidFill>
@@ -10295,7 +10127,7 @@
           <a:bodyPr wrap="square" lIns="0" tIns="0" rIns="0" bIns="0" rtlCol="0" anchor="t"/>
           <a:lstStyle/>
           <a:p>
-            <a:pPr algn="l" indent="0" marL="0">
+            <a:pPr marL="0" indent="0" algn="l">
               <a:lnSpc>
                 <a:spcPct val="103000"/>
               </a:lnSpc>
@@ -10315,7 +10147,7 @@
             <a:endParaRPr lang="en-US" sz="3400" dirty="0"/>
           </a:p>
           <a:p>
-            <a:pPr algn="l" indent="0" marL="0">
+            <a:pPr marL="0" indent="0" algn="l">
               <a:lnSpc>
                 <a:spcPct val="103000"/>
               </a:lnSpc>
@@ -10357,7 +10189,7 @@
           <a:bodyPr wrap="square" lIns="0" tIns="0" rIns="0" bIns="0" rtlCol="0" anchor="t"/>
           <a:lstStyle/>
           <a:p>
-            <a:pPr algn="l" indent="0" marL="0">
+            <a:pPr marL="0" indent="0" algn="l">
               <a:lnSpc>
                 <a:spcPct val="128000"/>
               </a:lnSpc>
@@ -10533,11 +10365,11 @@
           <a:bodyPr wrap="square" lIns="0" tIns="0" rIns="0" bIns="0" rtlCol="0" anchor="ctr"/>
           <a:lstStyle/>
           <a:p>
-            <a:pPr algn="ctr" indent="0" marL="0">
-              <a:buNone/>
-            </a:pPr>
-            <a:r>
-              <a:rPr lang="en-US" sz="1000" b="1" spc="120" kern="0" dirty="0">
+            <a:pPr marL="0" indent="0" algn="ctr">
+              <a:buNone/>
+            </a:pPr>
+            <a:r>
+              <a:rPr lang="en-US" sz="1000" b="1" kern="0" spc="120" dirty="0">
                 <a:solidFill>
                   <a:srgbClr val="3B5BDB"/>
                 </a:solidFill>
@@ -10594,11 +10426,11 @@
           <a:bodyPr wrap="square" lIns="0" tIns="0" rIns="0" bIns="0" rtlCol="0" anchor="ctr"/>
           <a:lstStyle/>
           <a:p>
-            <a:pPr indent="0" marL="0">
-              <a:buNone/>
-            </a:pPr>
-            <a:r>
-              <a:rPr lang="en-US" sz="1050" b="1" spc="60" kern="0" dirty="0">
+            <a:pPr marL="0" indent="0">
+              <a:buNone/>
+            </a:pPr>
+            <a:r>
+              <a:rPr lang="en-US" sz="1050" b="1" kern="0" spc="60" dirty="0">
                 <a:solidFill>
                   <a:srgbClr val="3B5BDB"/>
                 </a:solidFill>
@@ -10633,7 +10465,7 @@
           <a:bodyPr wrap="square" lIns="0" tIns="0" rIns="0" bIns="0" rtlCol="0" anchor="ctr"/>
           <a:lstStyle/>
           <a:p>
-            <a:pPr indent="0" marL="0">
+            <a:pPr marL="0" indent="0">
               <a:lnSpc>
                 <a:spcPct val="112000"/>
               </a:lnSpc>
@@ -10697,11 +10529,11 @@
           <a:bodyPr wrap="square" lIns="0" tIns="0" rIns="0" bIns="0" rtlCol="0" anchor="ctr"/>
           <a:lstStyle/>
           <a:p>
-            <a:pPr indent="0" marL="0">
-              <a:buNone/>
-            </a:pPr>
-            <a:r>
-              <a:rPr lang="en-US" sz="1050" b="1" spc="60" kern="0" dirty="0">
+            <a:pPr marL="0" indent="0">
+              <a:buNone/>
+            </a:pPr>
+            <a:r>
+              <a:rPr lang="en-US" sz="1050" b="1" kern="0" spc="60" dirty="0">
                 <a:solidFill>
                   <a:srgbClr val="3B5BDB"/>
                 </a:solidFill>
@@ -10736,7 +10568,7 @@
           <a:bodyPr wrap="square" lIns="0" tIns="0" rIns="0" bIns="0" rtlCol="0" anchor="ctr"/>
           <a:lstStyle/>
           <a:p>
-            <a:pPr indent="0" marL="0">
+            <a:pPr marL="0" indent="0">
               <a:lnSpc>
                 <a:spcPct val="112000"/>
               </a:lnSpc>
@@ -10800,11 +10632,11 @@
           <a:bodyPr wrap="square" lIns="0" tIns="0" rIns="0" bIns="0" rtlCol="0" anchor="ctr"/>
           <a:lstStyle/>
           <a:p>
-            <a:pPr indent="0" marL="0">
-              <a:buNone/>
-            </a:pPr>
-            <a:r>
-              <a:rPr lang="en-US" sz="1050" b="1" spc="60" kern="0" dirty="0">
+            <a:pPr marL="0" indent="0">
+              <a:buNone/>
+            </a:pPr>
+            <a:r>
+              <a:rPr lang="en-US" sz="1050" b="1" kern="0" spc="60" dirty="0">
                 <a:solidFill>
                   <a:srgbClr val="3B5BDB"/>
                 </a:solidFill>
@@ -10839,7 +10671,7 @@
           <a:bodyPr wrap="square" lIns="0" tIns="0" rIns="0" bIns="0" rtlCol="0" anchor="ctr"/>
           <a:lstStyle/>
           <a:p>
-            <a:pPr indent="0" marL="0">
+            <a:pPr marL="0" indent="0">
               <a:lnSpc>
                 <a:spcPct val="112000"/>
               </a:lnSpc>
@@ -10903,11 +10735,11 @@
           <a:bodyPr wrap="square" lIns="0" tIns="0" rIns="0" bIns="0" rtlCol="0" anchor="ctr"/>
           <a:lstStyle/>
           <a:p>
-            <a:pPr indent="0" marL="0">
-              <a:buNone/>
-            </a:pPr>
-            <a:r>
-              <a:rPr lang="en-US" sz="1050" b="1" spc="60" kern="0" dirty="0">
+            <a:pPr marL="0" indent="0">
+              <a:buNone/>
+            </a:pPr>
+            <a:r>
+              <a:rPr lang="en-US" sz="1050" b="1" kern="0" spc="60" dirty="0">
                 <a:solidFill>
                   <a:srgbClr val="3B5BDB"/>
                 </a:solidFill>
@@ -10942,7 +10774,7 @@
           <a:bodyPr wrap="square" lIns="0" tIns="0" rIns="0" bIns="0" rtlCol="0" anchor="ctr"/>
           <a:lstStyle/>
           <a:p>
-            <a:pPr indent="0" marL="0">
+            <a:pPr marL="0" indent="0">
               <a:lnSpc>
                 <a:spcPct val="112000"/>
               </a:lnSpc>
@@ -10968,9 +10800,18 @@
   <p:clrMapOvr>
     <a:masterClrMapping/>
   </p:clrMapOvr>
-  <p:transition xmlns:p14="http://schemas.microsoft.com/office/powerpoint/2010/main" p14:dur="700" spd="slow">
-    <p159:morph xmlns:p159="http://schemas.microsoft.com/office/powerpoint/2015/09/main" option="byObject"/>
-  </p:transition>
+  <mc:AlternateContent xmlns:mc="http://schemas.openxmlformats.org/markup-compatibility/2006">
+    <mc:Choice xmlns:p159="http://schemas.microsoft.com/office/powerpoint/2015/09/main" Requires="p159">
+      <p:transition xmlns:p14="http://schemas.microsoft.com/office/powerpoint/2010/main" spd="med" p14:dur="700">
+        <p159:morph option="byObject"/>
+      </p:transition>
+    </mc:Choice>
+    <mc:Fallback>
+      <p:transition spd="med">
+        <p:fade/>
+      </p:transition>
+    </mc:Fallback>
+  </mc:AlternateContent>
 </p:sld>
 </file>
 
@@ -10982,6 +10823,7 @@
         <a:solidFill>
           <a:srgbClr val="0D1225"/>
         </a:solidFill>
+        <a:effectLst/>
       </p:bgPr>
     </p:bg>
     <p:spTree>
@@ -11019,11 +10861,11 @@
           <a:bodyPr wrap="square" lIns="0" tIns="0" rIns="0" bIns="0" rtlCol="0" anchor="ctr"/>
           <a:lstStyle/>
           <a:p>
-            <a:pPr algn="l" indent="0" marL="0">
-              <a:buNone/>
-            </a:pPr>
-            <a:r>
-              <a:rPr lang="en-US" sz="1100" b="1" spc="300" kern="0" dirty="0">
+            <a:pPr marL="0" indent="0" algn="l">
+              <a:buNone/>
+            </a:pPr>
+            <a:r>
+              <a:rPr lang="en-US" sz="1100" b="1" kern="0" spc="300" dirty="0">
                 <a:solidFill>
                   <a:srgbClr val="6E7BA0"/>
                 </a:solidFill>
@@ -11058,11 +10900,11 @@
           <a:bodyPr wrap="square" lIns="0" tIns="0" rIns="0" bIns="0" rtlCol="0" anchor="ctr"/>
           <a:lstStyle/>
           <a:p>
-            <a:pPr algn="r" indent="0" marL="0">
-              <a:buNone/>
-            </a:pPr>
-            <a:r>
-              <a:rPr lang="en-US" sz="1100" b="1" spc="200" kern="0" dirty="0">
+            <a:pPr marL="0" indent="0" algn="r">
+              <a:buNone/>
+            </a:pPr>
+            <a:r>
+              <a:rPr lang="en-US" sz="1100" b="1" kern="0" spc="200" dirty="0">
                 <a:solidFill>
                   <a:srgbClr val="F2B705"/>
                 </a:solidFill>
@@ -11097,7 +10939,7 @@
           <a:bodyPr wrap="square" lIns="0" tIns="0" rIns="0" bIns="0" rtlCol="0" anchor="t"/>
           <a:lstStyle/>
           <a:p>
-            <a:pPr algn="l" indent="0" marL="0">
+            <a:pPr marL="0" indent="0" algn="l">
               <a:lnSpc>
                 <a:spcPct val="103000"/>
               </a:lnSpc>
@@ -11117,7 +10959,7 @@
             <a:endParaRPr lang="en-US" sz="3400" dirty="0"/>
           </a:p>
           <a:p>
-            <a:pPr algn="l" indent="0" marL="0">
+            <a:pPr marL="0" indent="0" algn="l">
               <a:lnSpc>
                 <a:spcPct val="103000"/>
               </a:lnSpc>
@@ -11159,7 +11001,7 @@
           <a:bodyPr wrap="square" lIns="0" tIns="0" rIns="0" bIns="0" rtlCol="0" anchor="t"/>
           <a:lstStyle/>
           <a:p>
-            <a:pPr algn="l" indent="0" marL="0">
+            <a:pPr marL="0" indent="0" algn="l">
               <a:lnSpc>
                 <a:spcPct val="128000"/>
               </a:lnSpc>
@@ -11243,7 +11085,7 @@
             <a:prstDash val="solid"/>
           </a:ln>
           <a:effectLst>
-            <a:outerShdw sx="100000" sy="100000" kx="0" ky="0" algn="bl" rotWithShape="0" blurRad="177800" dist="76200" dir="5400000">
+            <a:outerShdw blurRad="177800" dist="76200" dir="5400000" algn="bl" rotWithShape="0">
               <a:srgbClr val="000000">
                 <a:alpha val="45000"/>
               </a:srgbClr>
@@ -11618,11 +11460,11 @@
           <a:bodyPr wrap="square" lIns="0" tIns="0" rIns="0" bIns="0" rtlCol="0" anchor="ctr"/>
           <a:lstStyle/>
           <a:p>
-            <a:pPr indent="0" marL="0">
-              <a:buNone/>
-            </a:pPr>
-            <a:r>
-              <a:rPr lang="en-US" sz="1050" b="1" spc="100" kern="0" dirty="0">
+            <a:pPr marL="0" indent="0">
+              <a:buNone/>
+            </a:pPr>
+            <a:r>
+              <a:rPr lang="en-US" sz="1050" b="1" kern="0" spc="100" dirty="0">
                 <a:solidFill>
                   <a:srgbClr val="A9B4CC"/>
                 </a:solidFill>
@@ -11641,9 +11483,18 @@
   <p:clrMapOvr>
     <a:masterClrMapping/>
   </p:clrMapOvr>
-  <p:transition xmlns:p14="http://schemas.microsoft.com/office/powerpoint/2010/main" p14:dur="700" spd="slow">
-    <p159:morph xmlns:p159="http://schemas.microsoft.com/office/powerpoint/2015/09/main" option="byObject"/>
-  </p:transition>
+  <mc:AlternateContent xmlns:mc="http://schemas.openxmlformats.org/markup-compatibility/2006">
+    <mc:Choice xmlns:p159="http://schemas.microsoft.com/office/powerpoint/2015/09/main" Requires="p159">
+      <p:transition xmlns:p14="http://schemas.microsoft.com/office/powerpoint/2010/main" spd="med" p14:dur="700">
+        <p159:morph option="byObject"/>
+      </p:transition>
+    </mc:Choice>
+    <mc:Fallback>
+      <p:transition spd="med">
+        <p:fade/>
+      </p:transition>
+    </mc:Fallback>
+  </mc:AlternateContent>
 </p:sld>
 </file>
 
@@ -11655,6 +11506,7 @@
         <a:solidFill>
           <a:srgbClr val="0D1225"/>
         </a:solidFill>
+        <a:effectLst/>
       </p:bgPr>
     </p:bg>
     <p:spTree>
@@ -11692,11 +11544,11 @@
           <a:bodyPr wrap="square" lIns="0" tIns="0" rIns="0" bIns="0" rtlCol="0" anchor="ctr"/>
           <a:lstStyle/>
           <a:p>
-            <a:pPr algn="l" indent="0" marL="0">
-              <a:buNone/>
-            </a:pPr>
-            <a:r>
-              <a:rPr lang="en-US" sz="1100" b="1" spc="300" kern="0" dirty="0">
+            <a:pPr marL="0" indent="0" algn="l">
+              <a:buNone/>
+            </a:pPr>
+            <a:r>
+              <a:rPr lang="en-US" sz="1100" b="1" kern="0" spc="300" dirty="0">
                 <a:solidFill>
                   <a:srgbClr val="6E7BA0"/>
                 </a:solidFill>
@@ -11731,11 +11583,11 @@
           <a:bodyPr wrap="square" lIns="0" tIns="0" rIns="0" bIns="0" rtlCol="0" anchor="ctr"/>
           <a:lstStyle/>
           <a:p>
-            <a:pPr algn="r" indent="0" marL="0">
-              <a:buNone/>
-            </a:pPr>
-            <a:r>
-              <a:rPr lang="en-US" sz="1100" b="1" spc="200" kern="0" dirty="0">
+            <a:pPr marL="0" indent="0" algn="r">
+              <a:buNone/>
+            </a:pPr>
+            <a:r>
+              <a:rPr lang="en-US" sz="1100" b="1" kern="0" spc="200" dirty="0">
                 <a:solidFill>
                   <a:srgbClr val="F2B705"/>
                 </a:solidFill>
@@ -11770,7 +11622,7 @@
           <a:bodyPr wrap="square" lIns="0" tIns="0" rIns="0" bIns="0" rtlCol="0" anchor="t"/>
           <a:lstStyle/>
           <a:p>
-            <a:pPr algn="l" indent="0" marL="0">
+            <a:pPr marL="0" indent="0" algn="l">
               <a:lnSpc>
                 <a:spcPct val="103000"/>
               </a:lnSpc>
@@ -11812,7 +11664,7 @@
           <a:bodyPr wrap="square" lIns="0" tIns="0" rIns="0" bIns="0" rtlCol="0" anchor="t"/>
           <a:lstStyle/>
           <a:p>
-            <a:pPr algn="l" indent="0" marL="0">
+            <a:pPr marL="0" indent="0" algn="l">
               <a:lnSpc>
                 <a:spcPct val="128000"/>
               </a:lnSpc>
@@ -11880,8 +11732,8 @@
           <p:nvPr/>
         </p:nvSpPr>
         <p:spPr>
-          <a:xfrm rot="720000">
-            <a:off x="8805672" y="2651760"/>
+          <a:xfrm rot="813712">
+            <a:off x="9337517" y="1275589"/>
             <a:ext cx="1316736" cy="1737360"/>
           </a:xfrm>
           <a:prstGeom prst="roundRect">
@@ -11901,7 +11753,7 @@
             <a:prstDash val="dash"/>
           </a:ln>
           <a:effectLst>
-            <a:outerShdw sx="100000" sy="100000" kx="0" ky="0" algn="bl" rotWithShape="0" blurRad="177800" dist="76200" dir="5400000">
+            <a:outerShdw blurRad="177800" dist="76200" dir="5400000" algn="bl" rotWithShape="0">
               <a:srgbClr val="000000">
                 <a:alpha val="45000"/>
               </a:srgbClr>
@@ -11930,11 +11782,11 @@
           <a:bodyPr wrap="square" lIns="0" tIns="0" rIns="0" bIns="0" rtlCol="0" anchor="ctr"/>
           <a:lstStyle/>
           <a:p>
-            <a:pPr algn="ctr" indent="0" marL="0">
-              <a:buNone/>
-            </a:pPr>
-            <a:r>
-              <a:rPr lang="en-US" sz="1050" b="1" spc="150" kern="0" dirty="0">
+            <a:pPr marL="0" indent="0" algn="ctr">
+              <a:buNone/>
+            </a:pPr>
+            <a:r>
+              <a:rPr lang="en-US" sz="1050" b="1" kern="0" spc="150" dirty="0">
                 <a:solidFill>
                   <a:srgbClr val="8792AD"/>
                 </a:solidFill>
@@ -11991,11 +11843,11 @@
           <a:bodyPr wrap="square" lIns="0" tIns="0" rIns="0" bIns="0" rtlCol="0" anchor="ctr"/>
           <a:lstStyle/>
           <a:p>
-            <a:pPr indent="0" marL="0">
-              <a:buNone/>
-            </a:pPr>
-            <a:r>
-              <a:rPr lang="en-US" sz="1050" b="1" spc="60" kern="0" dirty="0">
+            <a:pPr marL="0" indent="0">
+              <a:buNone/>
+            </a:pPr>
+            <a:r>
+              <a:rPr lang="en-US" sz="1050" b="1" kern="0" spc="60" dirty="0">
                 <a:solidFill>
                   <a:srgbClr val="F2B705"/>
                 </a:solidFill>
@@ -12030,7 +11882,7 @@
           <a:bodyPr wrap="square" lIns="0" tIns="0" rIns="0" bIns="0" rtlCol="0" anchor="ctr"/>
           <a:lstStyle/>
           <a:p>
-            <a:pPr indent="0" marL="0">
+            <a:pPr marL="0" indent="0">
               <a:lnSpc>
                 <a:spcPct val="112000"/>
               </a:lnSpc>
@@ -12094,11 +11946,11 @@
           <a:bodyPr wrap="square" lIns="0" tIns="0" rIns="0" bIns="0" rtlCol="0" anchor="ctr"/>
           <a:lstStyle/>
           <a:p>
-            <a:pPr indent="0" marL="0">
-              <a:buNone/>
-            </a:pPr>
-            <a:r>
-              <a:rPr lang="en-US" sz="1050" b="1" spc="60" kern="0" dirty="0">
+            <a:pPr marL="0" indent="0">
+              <a:buNone/>
+            </a:pPr>
+            <a:r>
+              <a:rPr lang="en-US" sz="1050" b="1" kern="0" spc="60" dirty="0">
                 <a:solidFill>
                   <a:srgbClr val="F2B705"/>
                 </a:solidFill>
@@ -12133,7 +11985,7 @@
           <a:bodyPr wrap="square" lIns="0" tIns="0" rIns="0" bIns="0" rtlCol="0" anchor="ctr"/>
           <a:lstStyle/>
           <a:p>
-            <a:pPr indent="0" marL="0">
+            <a:pPr marL="0" indent="0">
               <a:lnSpc>
                 <a:spcPct val="112000"/>
               </a:lnSpc>
@@ -12197,11 +12049,11 @@
           <a:bodyPr wrap="square" lIns="0" tIns="0" rIns="0" bIns="0" rtlCol="0" anchor="ctr"/>
           <a:lstStyle/>
           <a:p>
-            <a:pPr indent="0" marL="0">
-              <a:buNone/>
-            </a:pPr>
-            <a:r>
-              <a:rPr lang="en-US" sz="1050" b="1" spc="60" kern="0" dirty="0">
+            <a:pPr marL="0" indent="0">
+              <a:buNone/>
+            </a:pPr>
+            <a:r>
+              <a:rPr lang="en-US" sz="1050" b="1" kern="0" spc="60" dirty="0">
                 <a:solidFill>
                   <a:srgbClr val="F2B705"/>
                 </a:solidFill>
@@ -12236,7 +12088,7 @@
           <a:bodyPr wrap="square" lIns="0" tIns="0" rIns="0" bIns="0" rtlCol="0" anchor="ctr"/>
           <a:lstStyle/>
           <a:p>
-            <a:pPr indent="0" marL="0">
+            <a:pPr marL="0" indent="0">
               <a:lnSpc>
                 <a:spcPct val="112000"/>
               </a:lnSpc>
@@ -12262,9 +12114,18 @@
   <p:clrMapOvr>
     <a:masterClrMapping/>
   </p:clrMapOvr>
-  <p:transition xmlns:p14="http://schemas.microsoft.com/office/powerpoint/2010/main" p14:dur="700" spd="slow">
-    <p159:morph xmlns:p159="http://schemas.microsoft.com/office/powerpoint/2015/09/main" option="byObject"/>
-  </p:transition>
+  <mc:AlternateContent xmlns:mc="http://schemas.openxmlformats.org/markup-compatibility/2006">
+    <mc:Choice xmlns:p159="http://schemas.microsoft.com/office/powerpoint/2015/09/main" Requires="p159">
+      <p:transition xmlns:p14="http://schemas.microsoft.com/office/powerpoint/2010/main" spd="med" p14:dur="700">
+        <p159:morph option="byObject"/>
+      </p:transition>
+    </mc:Choice>
+    <mc:Fallback>
+      <p:transition spd="med">
+        <p:fade/>
+      </p:transition>
+    </mc:Fallback>
+  </mc:AlternateContent>
 </p:sld>
 </file>
 
@@ -12276,6 +12137,7 @@
         <a:solidFill>
           <a:srgbClr val="0D1225"/>
         </a:solidFill>
+        <a:effectLst/>
       </p:bgPr>
     </p:bg>
     <p:spTree>
@@ -12313,11 +12175,11 @@
           <a:bodyPr wrap="square" lIns="0" tIns="0" rIns="0" bIns="0" rtlCol="0" anchor="ctr"/>
           <a:lstStyle/>
           <a:p>
-            <a:pPr algn="l" indent="0" marL="0">
-              <a:buNone/>
-            </a:pPr>
-            <a:r>
-              <a:rPr lang="en-US" sz="1100" b="1" spc="300" kern="0" dirty="0">
+            <a:pPr marL="0" indent="0" algn="l">
+              <a:buNone/>
+            </a:pPr>
+            <a:r>
+              <a:rPr lang="en-US" sz="1100" b="1" kern="0" spc="300" dirty="0">
                 <a:solidFill>
                   <a:srgbClr val="6E7BA0"/>
                 </a:solidFill>
@@ -12352,11 +12214,11 @@
           <a:bodyPr wrap="square" lIns="0" tIns="0" rIns="0" bIns="0" rtlCol="0" anchor="ctr"/>
           <a:lstStyle/>
           <a:p>
-            <a:pPr algn="r" indent="0" marL="0">
-              <a:buNone/>
-            </a:pPr>
-            <a:r>
-              <a:rPr lang="en-US" sz="1100" b="1" spc="200" kern="0" dirty="0">
+            <a:pPr marL="0" indent="0" algn="r">
+              <a:buNone/>
+            </a:pPr>
+            <a:r>
+              <a:rPr lang="en-US" sz="1100" b="1" kern="0" spc="200" dirty="0">
                 <a:solidFill>
                   <a:srgbClr val="F2B705"/>
                 </a:solidFill>
@@ -12391,7 +12253,7 @@
           <a:bodyPr wrap="square" lIns="0" tIns="0" rIns="0" bIns="0" rtlCol="0" anchor="t"/>
           <a:lstStyle/>
           <a:p>
-            <a:pPr algn="l" indent="0" marL="0">
+            <a:pPr marL="0" indent="0" algn="l">
               <a:lnSpc>
                 <a:spcPct val="103000"/>
               </a:lnSpc>
@@ -12433,7 +12295,7 @@
           <a:bodyPr wrap="square" lIns="0" tIns="0" rIns="0" bIns="0" rtlCol="0" anchor="t"/>
           <a:lstStyle/>
           <a:p>
-            <a:pPr algn="l" indent="0" marL="0">
+            <a:pPr marL="0" indent="0" algn="l">
               <a:lnSpc>
                 <a:spcPct val="128000"/>
               </a:lnSpc>
@@ -12515,7 +12377,7 @@
           </a:solidFill>
           <a:ln/>
           <a:effectLst>
-            <a:outerShdw sx="100000" sy="100000" kx="0" ky="0" algn="bl" rotWithShape="0" blurRad="177800" dist="76200" dir="5400000">
+            <a:outerShdw blurRad="177800" dist="76200" dir="5400000" algn="bl" rotWithShape="0">
               <a:srgbClr val="000000">
                 <a:alpha val="45000"/>
               </a:srgbClr>
@@ -12584,11 +12446,11 @@
           <a:bodyPr wrap="square" lIns="0" tIns="0" rIns="0" bIns="0" rtlCol="0" anchor="ctr"/>
           <a:lstStyle/>
           <a:p>
-            <a:pPr algn="ctr" indent="0" marL="0">
-              <a:buNone/>
-            </a:pPr>
-            <a:r>
-              <a:rPr lang="en-US" sz="1100" b="1" spc="200" kern="0" dirty="0">
+            <a:pPr marL="0" indent="0" algn="ctr">
+              <a:buNone/>
+            </a:pPr>
+            <a:r>
+              <a:rPr lang="en-US" sz="1100" b="1" kern="0" spc="200" dirty="0">
                 <a:solidFill>
                   <a:srgbClr val="F2B705"/>
                 </a:solidFill>
@@ -12607,9 +12469,18 @@
   <p:clrMapOvr>
     <a:masterClrMapping/>
   </p:clrMapOvr>
-  <p:transition xmlns:p14="http://schemas.microsoft.com/office/powerpoint/2010/main" p14:dur="700" spd="slow">
-    <p159:morph xmlns:p159="http://schemas.microsoft.com/office/powerpoint/2015/09/main" option="byObject"/>
-  </p:transition>
+  <mc:AlternateContent xmlns:mc="http://schemas.openxmlformats.org/markup-compatibility/2006">
+    <mc:Choice xmlns:p159="http://schemas.microsoft.com/office/powerpoint/2015/09/main" Requires="p159">
+      <p:transition xmlns:p14="http://schemas.microsoft.com/office/powerpoint/2010/main" spd="med" p14:dur="700">
+        <p159:morph option="byObject"/>
+      </p:transition>
+    </mc:Choice>
+    <mc:Fallback>
+      <p:transition spd="med">
+        <p:fade/>
+      </p:transition>
+    </mc:Fallback>
+  </mc:AlternateContent>
 </p:sld>
 </file>
 
@@ -12621,6 +12492,7 @@
         <a:solidFill>
           <a:srgbClr val="0D1225"/>
         </a:solidFill>
+        <a:effectLst/>
       </p:bgPr>
     </p:bg>
     <p:spTree>
@@ -12658,11 +12530,11 @@
           <a:bodyPr wrap="square" lIns="0" tIns="0" rIns="0" bIns="0" rtlCol="0" anchor="ctr"/>
           <a:lstStyle/>
           <a:p>
-            <a:pPr algn="l" indent="0" marL="0">
-              <a:buNone/>
-            </a:pPr>
-            <a:r>
-              <a:rPr lang="en-US" sz="1100" b="1" spc="300" kern="0" dirty="0">
+            <a:pPr marL="0" indent="0" algn="l">
+              <a:buNone/>
+            </a:pPr>
+            <a:r>
+              <a:rPr lang="en-US" sz="1100" b="1" kern="0" spc="300" dirty="0">
                 <a:solidFill>
                   <a:srgbClr val="6E7BA0"/>
                 </a:solidFill>
@@ -12697,11 +12569,11 @@
           <a:bodyPr wrap="square" lIns="0" tIns="0" rIns="0" bIns="0" rtlCol="0" anchor="ctr"/>
           <a:lstStyle/>
           <a:p>
-            <a:pPr algn="r" indent="0" marL="0">
-              <a:buNone/>
-            </a:pPr>
-            <a:r>
-              <a:rPr lang="en-US" sz="1100" b="1" spc="200" kern="0" dirty="0">
+            <a:pPr marL="0" indent="0" algn="r">
+              <a:buNone/>
+            </a:pPr>
+            <a:r>
+              <a:rPr lang="en-US" sz="1100" b="1" kern="0" spc="200" dirty="0">
                 <a:solidFill>
                   <a:srgbClr val="F2B705"/>
                 </a:solidFill>
@@ -12736,7 +12608,7 @@
           <a:bodyPr wrap="square" lIns="0" tIns="0" rIns="0" bIns="0" rtlCol="0" anchor="t"/>
           <a:lstStyle/>
           <a:p>
-            <a:pPr algn="l" indent="0" marL="0">
+            <a:pPr marL="0" indent="0" algn="l">
               <a:lnSpc>
                 <a:spcPct val="103000"/>
               </a:lnSpc>
@@ -12756,7 +12628,7 @@
             <a:endParaRPr lang="en-US" sz="3400" dirty="0"/>
           </a:p>
           <a:p>
-            <a:pPr algn="l" indent="0" marL="0">
+            <a:pPr marL="0" indent="0" algn="l">
               <a:lnSpc>
                 <a:spcPct val="103000"/>
               </a:lnSpc>
@@ -12798,7 +12670,7 @@
           <a:bodyPr wrap="square" lIns="0" tIns="0" rIns="0" bIns="0" rtlCol="0" anchor="t"/>
           <a:lstStyle/>
           <a:p>
-            <a:pPr algn="l" indent="0" marL="0">
+            <a:pPr marL="0" indent="0" algn="l">
               <a:lnSpc>
                 <a:spcPct val="122000"/>
               </a:lnSpc>
@@ -12818,7 +12690,7 @@
             <a:endParaRPr lang="en-US" sz="1280" dirty="0"/>
           </a:p>
           <a:p>
-            <a:pPr algn="l" indent="0" marL="0">
+            <a:pPr marL="0" indent="0" algn="l">
               <a:lnSpc>
                 <a:spcPct val="122000"/>
               </a:lnSpc>
@@ -12838,7 +12710,7 @@
             <a:endParaRPr lang="en-US" sz="1280" dirty="0"/>
           </a:p>
           <a:p>
-            <a:pPr algn="l" indent="0" marL="0">
+            <a:pPr marL="0" indent="0" algn="l">
               <a:lnSpc>
                 <a:spcPct val="122000"/>
               </a:lnSpc>
@@ -12858,7 +12730,7 @@
             <a:endParaRPr lang="en-US" sz="1280" dirty="0"/>
           </a:p>
           <a:p>
-            <a:pPr algn="l" indent="0" marL="0">
+            <a:pPr marL="0" indent="0" algn="l">
               <a:lnSpc>
                 <a:spcPct val="122000"/>
               </a:lnSpc>
@@ -12878,7 +12750,7 @@
             <a:endParaRPr lang="en-US" sz="1280" dirty="0"/>
           </a:p>
           <a:p>
-            <a:pPr algn="l" indent="0" marL="0">
+            <a:pPr marL="0" indent="0" algn="l">
               <a:lnSpc>
                 <a:spcPct val="122000"/>
               </a:lnSpc>
@@ -12960,7 +12832,7 @@
             <a:prstDash val="solid"/>
           </a:ln>
           <a:effectLst>
-            <a:outerShdw sx="100000" sy="100000" kx="0" ky="0" algn="bl" rotWithShape="0" blurRad="177800" dist="76200" dir="5400000">
+            <a:outerShdw blurRad="177800" dist="76200" dir="5400000" algn="bl" rotWithShape="0">
               <a:srgbClr val="000000">
                 <a:alpha val="45000"/>
               </a:srgbClr>
@@ -12995,9 +12867,18 @@
   <p:clrMapOvr>
     <a:masterClrMapping/>
   </p:clrMapOvr>
-  <p:transition xmlns:p14="http://schemas.microsoft.com/office/powerpoint/2010/main" p14:dur="700" spd="slow">
-    <p159:morph xmlns:p159="http://schemas.microsoft.com/office/powerpoint/2015/09/main" option="byObject"/>
-  </p:transition>
+  <mc:AlternateContent xmlns:mc="http://schemas.openxmlformats.org/markup-compatibility/2006">
+    <mc:Choice xmlns:p159="http://schemas.microsoft.com/office/powerpoint/2015/09/main" Requires="p159">
+      <p:transition xmlns:p14="http://schemas.microsoft.com/office/powerpoint/2010/main" spd="med" p14:dur="700">
+        <p159:morph option="byObject"/>
+      </p:transition>
+    </mc:Choice>
+    <mc:Fallback>
+      <p:transition spd="med">
+        <p:fade/>
+      </p:transition>
+    </mc:Fallback>
+  </mc:AlternateContent>
 </p:sld>
 </file>
 
@@ -13009,6 +12890,7 @@
         <a:solidFill>
           <a:srgbClr val="0D1225"/>
         </a:solidFill>
+        <a:effectLst/>
       </p:bgPr>
     </p:bg>
     <p:spTree>
@@ -13046,11 +12928,11 @@
           <a:bodyPr wrap="square" lIns="0" tIns="0" rIns="0" bIns="0" rtlCol="0" anchor="ctr"/>
           <a:lstStyle/>
           <a:p>
-            <a:pPr algn="l" indent="0" marL="0">
-              <a:buNone/>
-            </a:pPr>
-            <a:r>
-              <a:rPr lang="en-US" sz="1100" b="1" spc="300" kern="0" dirty="0">
+            <a:pPr marL="0" indent="0" algn="l">
+              <a:buNone/>
+            </a:pPr>
+            <a:r>
+              <a:rPr lang="en-US" sz="1100" b="1" kern="0" spc="300" dirty="0">
                 <a:solidFill>
                   <a:srgbClr val="6E7BA0"/>
                 </a:solidFill>
@@ -13085,11 +12967,11 @@
           <a:bodyPr wrap="square" lIns="0" tIns="0" rIns="0" bIns="0" rtlCol="0" anchor="ctr"/>
           <a:lstStyle/>
           <a:p>
-            <a:pPr algn="r" indent="0" marL="0">
-              <a:buNone/>
-            </a:pPr>
-            <a:r>
-              <a:rPr lang="en-US" sz="1100" b="1" spc="200" kern="0" dirty="0">
+            <a:pPr marL="0" indent="0" algn="r">
+              <a:buNone/>
+            </a:pPr>
+            <a:r>
+              <a:rPr lang="en-US" sz="1100" b="1" kern="0" spc="200" dirty="0">
                 <a:solidFill>
                   <a:srgbClr val="F2B705"/>
                 </a:solidFill>
@@ -13124,7 +13006,7 @@
           <a:bodyPr wrap="square" lIns="0" tIns="0" rIns="0" bIns="0" rtlCol="0" anchor="t"/>
           <a:lstStyle/>
           <a:p>
-            <a:pPr algn="l" indent="0" marL="0">
+            <a:pPr marL="0" indent="0" algn="l">
               <a:lnSpc>
                 <a:spcPct val="103000"/>
               </a:lnSpc>
@@ -13166,7 +13048,7 @@
           <a:bodyPr wrap="square" lIns="0" tIns="0" rIns="0" bIns="0" rtlCol="0" anchor="t"/>
           <a:lstStyle/>
           <a:p>
-            <a:pPr algn="l" indent="0" marL="0">
+            <a:pPr marL="0" indent="0" algn="l">
               <a:lnSpc>
                 <a:spcPct val="128000"/>
               </a:lnSpc>
@@ -13374,7 +13256,7 @@
           <a:bodyPr wrap="square" lIns="0" tIns="0" rIns="0" bIns="0" rtlCol="0" anchor="ctr"/>
           <a:lstStyle/>
           <a:p>
-            <a:pPr algn="ctr" indent="0" marL="0">
+            <a:pPr marL="0" indent="0" algn="ctr">
               <a:buNone/>
             </a:pPr>
             <a:r>
@@ -13413,7 +13295,7 @@
           <a:bodyPr wrap="square" lIns="0" tIns="0" rIns="0" bIns="0" rtlCol="0" anchor="ctr"/>
           <a:lstStyle/>
           <a:p>
-            <a:pPr algn="ctr" indent="0" marL="0">
+            <a:pPr marL="0" indent="0" algn="ctr">
               <a:buNone/>
             </a:pPr>
             <a:r>
@@ -13534,7 +13416,7 @@
           <a:bodyPr wrap="square" lIns="0" tIns="0" rIns="0" bIns="0" rtlCol="0" anchor="ctr"/>
           <a:lstStyle/>
           <a:p>
-            <a:pPr algn="ctr" indent="0" marL="0">
+            <a:pPr marL="0" indent="0" algn="ctr">
               <a:buNone/>
             </a:pPr>
             <a:r>
@@ -13573,7 +13455,7 @@
           <a:bodyPr wrap="square" lIns="0" tIns="0" rIns="0" bIns="0" rtlCol="0" anchor="ctr"/>
           <a:lstStyle/>
           <a:p>
-            <a:pPr algn="ctr" indent="0" marL="0">
+            <a:pPr marL="0" indent="0" algn="ctr">
               <a:buNone/>
             </a:pPr>
             <a:r>
@@ -13694,7 +13576,7 @@
           <a:bodyPr wrap="square" lIns="0" tIns="0" rIns="0" bIns="0" rtlCol="0" anchor="ctr"/>
           <a:lstStyle/>
           <a:p>
-            <a:pPr algn="ctr" indent="0" marL="0">
+            <a:pPr marL="0" indent="0" algn="ctr">
               <a:buNone/>
             </a:pPr>
             <a:r>
@@ -13733,7 +13615,7 @@
           <a:bodyPr wrap="square" lIns="0" tIns="0" rIns="0" bIns="0" rtlCol="0" anchor="ctr"/>
           <a:lstStyle/>
           <a:p>
-            <a:pPr algn="ctr" indent="0" marL="0">
+            <a:pPr marL="0" indent="0" algn="ctr">
               <a:buNone/>
             </a:pPr>
             <a:r>
@@ -13834,7 +13716,7 @@
           <a:bodyPr wrap="square" lIns="0" tIns="0" rIns="0" bIns="0" rtlCol="0" anchor="ctr"/>
           <a:lstStyle/>
           <a:p>
-            <a:pPr algn="ctr" indent="0" marL="0">
+            <a:pPr marL="0" indent="0" algn="ctr">
               <a:buNone/>
             </a:pPr>
             <a:r>
@@ -13873,7 +13755,7 @@
           <a:bodyPr wrap="square" lIns="0" tIns="0" rIns="0" bIns="0" rtlCol="0" anchor="ctr"/>
           <a:lstStyle/>
           <a:p>
-            <a:pPr algn="ctr" indent="0" marL="0">
+            <a:pPr marL="0" indent="0" algn="ctr">
               <a:buNone/>
             </a:pPr>
             <a:r>
@@ -13896,9 +13778,18 @@
   <p:clrMapOvr>
     <a:masterClrMapping/>
   </p:clrMapOvr>
-  <p:transition xmlns:p14="http://schemas.microsoft.com/office/powerpoint/2010/main" p14:dur="700" spd="slow">
-    <p159:morph xmlns:p159="http://schemas.microsoft.com/office/powerpoint/2015/09/main" option="byObject"/>
-  </p:transition>
+  <mc:AlternateContent xmlns:mc="http://schemas.openxmlformats.org/markup-compatibility/2006">
+    <mc:Choice xmlns:p159="http://schemas.microsoft.com/office/powerpoint/2015/09/main" Requires="p159">
+      <p:transition xmlns:p14="http://schemas.microsoft.com/office/powerpoint/2010/main" spd="med" p14:dur="700">
+        <p159:morph option="byObject"/>
+      </p:transition>
+    </mc:Choice>
+    <mc:Fallback>
+      <p:transition spd="med">
+        <p:fade/>
+      </p:transition>
+    </mc:Fallback>
+  </mc:AlternateContent>
 </p:sld>
 </file>
 
@@ -13910,6 +13801,7 @@
         <a:solidFill>
           <a:srgbClr val="0D1225"/>
         </a:solidFill>
+        <a:effectLst/>
       </p:bgPr>
     </p:bg>
     <p:spTree>
@@ -13947,11 +13839,11 @@
           <a:bodyPr wrap="square" lIns="0" tIns="0" rIns="0" bIns="0" rtlCol="0" anchor="ctr"/>
           <a:lstStyle/>
           <a:p>
-            <a:pPr algn="l" indent="0" marL="0">
-              <a:buNone/>
-            </a:pPr>
-            <a:r>
-              <a:rPr lang="en-US" sz="1100" b="1" spc="300" kern="0" dirty="0">
+            <a:pPr marL="0" indent="0" algn="l">
+              <a:buNone/>
+            </a:pPr>
+            <a:r>
+              <a:rPr lang="en-US" sz="1100" b="1" kern="0" spc="300" dirty="0">
                 <a:solidFill>
                   <a:srgbClr val="6E7BA0"/>
                 </a:solidFill>
@@ -13986,11 +13878,11 @@
           <a:bodyPr wrap="square" lIns="0" tIns="0" rIns="0" bIns="0" rtlCol="0" anchor="ctr"/>
           <a:lstStyle/>
           <a:p>
-            <a:pPr algn="r" indent="0" marL="0">
-              <a:buNone/>
-            </a:pPr>
-            <a:r>
-              <a:rPr lang="en-US" sz="1100" b="1" spc="200" kern="0" dirty="0">
+            <a:pPr marL="0" indent="0" algn="r">
+              <a:buNone/>
+            </a:pPr>
+            <a:r>
+              <a:rPr lang="en-US" sz="1100" b="1" kern="0" spc="200" dirty="0">
                 <a:solidFill>
                   <a:srgbClr val="F2B705"/>
                 </a:solidFill>
@@ -14025,7 +13917,7 @@
           <a:bodyPr wrap="square" lIns="0" tIns="0" rIns="0" bIns="0" rtlCol="0" anchor="t"/>
           <a:lstStyle/>
           <a:p>
-            <a:pPr algn="l" indent="0" marL="0">
+            <a:pPr marL="0" indent="0" algn="l">
               <a:lnSpc>
                 <a:spcPct val="103000"/>
               </a:lnSpc>
@@ -14067,7 +13959,7 @@
           <a:bodyPr wrap="square" lIns="0" tIns="0" rIns="0" bIns="0" rtlCol="0" anchor="t"/>
           <a:lstStyle/>
           <a:p>
-            <a:pPr algn="l" indent="0" marL="0">
+            <a:pPr marL="0" indent="0" algn="l">
               <a:lnSpc>
                 <a:spcPct val="128000"/>
               </a:lnSpc>
@@ -14239,7 +14131,7 @@
           <a:bodyPr wrap="square" lIns="0" tIns="0" rIns="0" bIns="0" rtlCol="0" anchor="ctr"/>
           <a:lstStyle/>
           <a:p>
-            <a:pPr algn="ctr" indent="0" marL="0">
+            <a:pPr marL="0" indent="0" algn="ctr">
               <a:buNone/>
             </a:pPr>
             <a:r>
@@ -14328,7 +14220,7 @@
           <a:bodyPr wrap="square" lIns="0" tIns="0" rIns="0" bIns="0" rtlCol="0" anchor="ctr"/>
           <a:lstStyle/>
           <a:p>
-            <a:pPr algn="ctr" indent="0" marL="0">
+            <a:pPr marL="0" indent="0" algn="ctr">
               <a:buNone/>
             </a:pPr>
             <a:r>
@@ -14417,7 +14309,7 @@
           <a:bodyPr wrap="square" lIns="0" tIns="0" rIns="0" bIns="0" rtlCol="0" anchor="ctr"/>
           <a:lstStyle/>
           <a:p>
-            <a:pPr algn="ctr" indent="0" marL="0">
+            <a:pPr marL="0" indent="0" algn="ctr">
               <a:lnSpc>
                 <a:spcPct val="105000"/>
               </a:lnSpc>
@@ -14437,7 +14329,7 @@
             <a:endParaRPr lang="en-US" sz="1050" dirty="0"/>
           </a:p>
           <a:p>
-            <a:pPr algn="ctr" indent="0" marL="0">
+            <a:pPr marL="0" indent="0" algn="ctr">
               <a:lnSpc>
                 <a:spcPct val="105000"/>
               </a:lnSpc>
@@ -14529,7 +14421,7 @@
           <a:bodyPr wrap="square" lIns="0" tIns="0" rIns="0" bIns="0" rtlCol="0" anchor="ctr"/>
           <a:lstStyle/>
           <a:p>
-            <a:pPr algn="ctr" indent="0" marL="0">
+            <a:pPr marL="0" indent="0" algn="ctr">
               <a:lnSpc>
                 <a:spcPct val="105000"/>
               </a:lnSpc>
@@ -14549,7 +14441,7 @@
             <a:endParaRPr lang="en-US" sz="1050" dirty="0"/>
           </a:p>
           <a:p>
-            <a:pPr algn="ctr" indent="0" marL="0">
+            <a:pPr marL="0" indent="0" algn="ctr">
               <a:lnSpc>
                 <a:spcPct val="105000"/>
               </a:lnSpc>
@@ -14641,7 +14533,7 @@
           <a:bodyPr wrap="square" lIns="0" tIns="0" rIns="0" bIns="0" rtlCol="0" anchor="ctr"/>
           <a:lstStyle/>
           <a:p>
-            <a:pPr algn="ctr" indent="0" marL="0">
+            <a:pPr marL="0" indent="0" algn="ctr">
               <a:lnSpc>
                 <a:spcPct val="105000"/>
               </a:lnSpc>
@@ -14661,7 +14553,7 @@
             <a:endParaRPr lang="en-US" sz="1050" dirty="0"/>
           </a:p>
           <a:p>
-            <a:pPr algn="ctr" indent="0" marL="0">
+            <a:pPr marL="0" indent="0" algn="ctr">
               <a:lnSpc>
                 <a:spcPct val="105000"/>
               </a:lnSpc>
@@ -14687,9 +14579,18 @@
   <p:clrMapOvr>
     <a:masterClrMapping/>
   </p:clrMapOvr>
-  <p:transition xmlns:p14="http://schemas.microsoft.com/office/powerpoint/2010/main" p14:dur="700" spd="slow">
-    <p159:morph xmlns:p159="http://schemas.microsoft.com/office/powerpoint/2015/09/main" option="byObject"/>
-  </p:transition>
+  <mc:AlternateContent xmlns:mc="http://schemas.openxmlformats.org/markup-compatibility/2006">
+    <mc:Choice xmlns:p159="http://schemas.microsoft.com/office/powerpoint/2015/09/main" Requires="p159">
+      <p:transition xmlns:p14="http://schemas.microsoft.com/office/powerpoint/2010/main" spd="med" p14:dur="700">
+        <p159:morph option="byObject"/>
+      </p:transition>
+    </mc:Choice>
+    <mc:Fallback>
+      <p:transition spd="med">
+        <p:fade/>
+      </p:transition>
+    </mc:Fallback>
+  </mc:AlternateContent>
 </p:sld>
 </file>
 
@@ -14701,6 +14602,7 @@
         <a:solidFill>
           <a:srgbClr val="0D1225"/>
         </a:solidFill>
+        <a:effectLst/>
       </p:bgPr>
     </p:bg>
     <p:spTree>
@@ -14738,11 +14640,11 @@
           <a:bodyPr wrap="square" lIns="0" tIns="0" rIns="0" bIns="0" rtlCol="0" anchor="ctr"/>
           <a:lstStyle/>
           <a:p>
-            <a:pPr algn="l" indent="0" marL="0">
-              <a:buNone/>
-            </a:pPr>
-            <a:r>
-              <a:rPr lang="en-US" sz="1100" b="1" spc="300" kern="0" dirty="0">
+            <a:pPr marL="0" indent="0" algn="l">
+              <a:buNone/>
+            </a:pPr>
+            <a:r>
+              <a:rPr lang="en-US" sz="1100" b="1" kern="0" spc="300" dirty="0">
                 <a:solidFill>
                   <a:srgbClr val="6E7BA0"/>
                 </a:solidFill>
@@ -14777,11 +14679,11 @@
           <a:bodyPr wrap="square" lIns="0" tIns="0" rIns="0" bIns="0" rtlCol="0" anchor="ctr"/>
           <a:lstStyle/>
           <a:p>
-            <a:pPr algn="r" indent="0" marL="0">
-              <a:buNone/>
-            </a:pPr>
-            <a:r>
-              <a:rPr lang="en-US" sz="1100" b="1" spc="200" kern="0" dirty="0">
+            <a:pPr marL="0" indent="0" algn="r">
+              <a:buNone/>
+            </a:pPr>
+            <a:r>
+              <a:rPr lang="en-US" sz="1100" b="1" kern="0" spc="200" dirty="0">
                 <a:solidFill>
                   <a:srgbClr val="F2B705"/>
                 </a:solidFill>
@@ -14816,7 +14718,7 @@
           <a:bodyPr wrap="square" lIns="0" tIns="0" rIns="0" bIns="0" rtlCol="0" anchor="t"/>
           <a:lstStyle/>
           <a:p>
-            <a:pPr algn="l" indent="0" marL="0">
+            <a:pPr marL="0" indent="0" algn="l">
               <a:lnSpc>
                 <a:spcPct val="103000"/>
               </a:lnSpc>
@@ -14858,7 +14760,7 @@
           <a:bodyPr wrap="square" lIns="0" tIns="0" rIns="0" bIns="0" rtlCol="0" anchor="t"/>
           <a:lstStyle/>
           <a:p>
-            <a:pPr algn="l" indent="0" marL="0">
+            <a:pPr marL="0" indent="0" algn="l">
               <a:lnSpc>
                 <a:spcPct val="128000"/>
               </a:lnSpc>
@@ -15041,7 +14943,7 @@
           <a:bodyPr wrap="square" lIns="0" tIns="0" rIns="0" bIns="0" rtlCol="0" anchor="ctr"/>
           <a:lstStyle/>
           <a:p>
-            <a:pPr algn="l" indent="0" marL="0">
+            <a:pPr marL="0" indent="0" algn="l">
               <a:lnSpc>
                 <a:spcPct val="105000"/>
               </a:lnSpc>
@@ -15127,7 +15029,7 @@
           <a:bodyPr wrap="square" lIns="0" tIns="0" rIns="0" bIns="0" rtlCol="0" anchor="ctr"/>
           <a:lstStyle/>
           <a:p>
-            <a:pPr algn="l" indent="0" marL="0">
+            <a:pPr marL="0" indent="0" algn="l">
               <a:lnSpc>
                 <a:spcPct val="105000"/>
               </a:lnSpc>
@@ -15213,7 +15115,7 @@
           <a:bodyPr wrap="square" lIns="0" tIns="0" rIns="0" bIns="0" rtlCol="0" anchor="ctr"/>
           <a:lstStyle/>
           <a:p>
-            <a:pPr algn="l" indent="0" marL="0">
+            <a:pPr marL="0" indent="0" algn="l">
               <a:lnSpc>
                 <a:spcPct val="105000"/>
               </a:lnSpc>
@@ -15299,7 +15201,7 @@
           <a:bodyPr wrap="square" lIns="0" tIns="0" rIns="0" bIns="0" rtlCol="0" anchor="ctr"/>
           <a:lstStyle/>
           <a:p>
-            <a:pPr algn="l" indent="0" marL="0">
+            <a:pPr marL="0" indent="0" algn="l">
               <a:lnSpc>
                 <a:spcPct val="105000"/>
               </a:lnSpc>
@@ -15385,7 +15287,7 @@
           <a:bodyPr wrap="square" lIns="0" tIns="0" rIns="0" bIns="0" rtlCol="0" anchor="ctr"/>
           <a:lstStyle/>
           <a:p>
-            <a:pPr algn="l" indent="0" marL="0">
+            <a:pPr marL="0" indent="0" algn="l">
               <a:lnSpc>
                 <a:spcPct val="105000"/>
               </a:lnSpc>
@@ -15471,7 +15373,7 @@
           <a:bodyPr wrap="square" lIns="0" tIns="0" rIns="0" bIns="0" rtlCol="0" anchor="ctr"/>
           <a:lstStyle/>
           <a:p>
-            <a:pPr algn="l" indent="0" marL="0">
+            <a:pPr marL="0" indent="0" algn="l">
               <a:lnSpc>
                 <a:spcPct val="105000"/>
               </a:lnSpc>
@@ -15557,7 +15459,7 @@
           <a:bodyPr wrap="square" lIns="0" tIns="0" rIns="0" bIns="0" rtlCol="0" anchor="ctr"/>
           <a:lstStyle/>
           <a:p>
-            <a:pPr algn="l" indent="0" marL="0">
+            <a:pPr marL="0" indent="0" algn="l">
               <a:lnSpc>
                 <a:spcPct val="105000"/>
               </a:lnSpc>
@@ -15643,7 +15545,7 @@
           <a:bodyPr wrap="square" lIns="0" tIns="0" rIns="0" bIns="0" rtlCol="0" anchor="ctr"/>
           <a:lstStyle/>
           <a:p>
-            <a:pPr algn="l" indent="0" marL="0">
+            <a:pPr marL="0" indent="0" algn="l">
               <a:lnSpc>
                 <a:spcPct val="105000"/>
               </a:lnSpc>
@@ -15729,7 +15631,7 @@
           <a:bodyPr wrap="square" lIns="0" tIns="0" rIns="0" bIns="0" rtlCol="0" anchor="ctr"/>
           <a:lstStyle/>
           <a:p>
-            <a:pPr algn="l" indent="0" marL="0">
+            <a:pPr marL="0" indent="0" algn="l">
               <a:lnSpc>
                 <a:spcPct val="105000"/>
               </a:lnSpc>
@@ -15755,9 +15657,18 @@
   <p:clrMapOvr>
     <a:masterClrMapping/>
   </p:clrMapOvr>
-  <p:transition xmlns:p14="http://schemas.microsoft.com/office/powerpoint/2010/main" p14:dur="700" spd="slow">
-    <p159:morph xmlns:p159="http://schemas.microsoft.com/office/powerpoint/2015/09/main" option="byObject"/>
-  </p:transition>
+  <mc:AlternateContent xmlns:mc="http://schemas.openxmlformats.org/markup-compatibility/2006">
+    <mc:Choice xmlns:p159="http://schemas.microsoft.com/office/powerpoint/2015/09/main" Requires="p159">
+      <p:transition xmlns:p14="http://schemas.microsoft.com/office/powerpoint/2010/main" spd="med" p14:dur="700">
+        <p159:morph option="byObject"/>
+      </p:transition>
+    </mc:Choice>
+    <mc:Fallback>
+      <p:transition spd="med">
+        <p:fade/>
+      </p:transition>
+    </mc:Fallback>
+  </mc:AlternateContent>
 </p:sld>
 </file>
 
@@ -15769,6 +15680,7 @@
         <a:solidFill>
           <a:srgbClr val="0D1225"/>
         </a:solidFill>
+        <a:effectLst/>
       </p:bgPr>
     </p:bg>
     <p:spTree>
@@ -15806,11 +15718,11 @@
           <a:bodyPr wrap="square" lIns="0" tIns="0" rIns="0" bIns="0" rtlCol="0" anchor="ctr"/>
           <a:lstStyle/>
           <a:p>
-            <a:pPr algn="l" indent="0" marL="0">
-              <a:buNone/>
-            </a:pPr>
-            <a:r>
-              <a:rPr lang="en-US" sz="1100" b="1" spc="300" kern="0" dirty="0">
+            <a:pPr marL="0" indent="0" algn="l">
+              <a:buNone/>
+            </a:pPr>
+            <a:r>
+              <a:rPr lang="en-US" sz="1100" b="1" kern="0" spc="300" dirty="0">
                 <a:solidFill>
                   <a:srgbClr val="6E7BA0"/>
                 </a:solidFill>
@@ -15845,11 +15757,11 @@
           <a:bodyPr wrap="square" lIns="0" tIns="0" rIns="0" bIns="0" rtlCol="0" anchor="ctr"/>
           <a:lstStyle/>
           <a:p>
-            <a:pPr algn="r" indent="0" marL="0">
-              <a:buNone/>
-            </a:pPr>
-            <a:r>
-              <a:rPr lang="en-US" sz="1100" b="1" spc="200" kern="0" dirty="0">
+            <a:pPr marL="0" indent="0" algn="r">
+              <a:buNone/>
+            </a:pPr>
+            <a:r>
+              <a:rPr lang="en-US" sz="1100" b="1" kern="0" spc="200" dirty="0">
                 <a:solidFill>
                   <a:srgbClr val="F2B705"/>
                 </a:solidFill>
@@ -15884,7 +15796,7 @@
           <a:bodyPr wrap="square" lIns="0" tIns="0" rIns="0" bIns="0" rtlCol="0" anchor="t"/>
           <a:lstStyle/>
           <a:p>
-            <a:pPr algn="l" indent="0" marL="0">
+            <a:pPr marL="0" indent="0" algn="l">
               <a:lnSpc>
                 <a:spcPct val="103000"/>
               </a:lnSpc>
@@ -15904,7 +15816,7 @@
             <a:endParaRPr lang="en-US" sz="3400" dirty="0"/>
           </a:p>
           <a:p>
-            <a:pPr algn="l" indent="0" marL="0">
+            <a:pPr marL="0" indent="0" algn="l">
               <a:lnSpc>
                 <a:spcPct val="103000"/>
               </a:lnSpc>
@@ -15946,7 +15858,7 @@
           <a:bodyPr wrap="square" lIns="0" tIns="0" rIns="0" bIns="0" rtlCol="0" anchor="t"/>
           <a:lstStyle/>
           <a:p>
-            <a:pPr algn="l" indent="0" marL="0">
+            <a:pPr marL="0" indent="0" algn="l">
               <a:lnSpc>
                 <a:spcPct val="128000"/>
               </a:lnSpc>
@@ -16033,7 +15945,7 @@
             <a:prstDash val="solid"/>
           </a:ln>
           <a:effectLst>
-            <a:outerShdw sx="100000" sy="100000" kx="0" ky="0" algn="bl" rotWithShape="0" blurRad="177800" dist="76200" dir="5400000">
+            <a:outerShdw blurRad="177800" dist="76200" dir="5400000" algn="bl" rotWithShape="0">
               <a:srgbClr val="000000">
                 <a:alpha val="45000"/>
               </a:srgbClr>
@@ -16126,11 +16038,11 @@
           <a:bodyPr wrap="square" lIns="0" tIns="0" rIns="0" bIns="0" rtlCol="0" anchor="ctr"/>
           <a:lstStyle/>
           <a:p>
-            <a:pPr algn="ctr" indent="0" marL="0">
-              <a:buNone/>
-            </a:pPr>
-            <a:r>
-              <a:rPr lang="en-US" sz="1000" b="1" spc="200" kern="0" dirty="0">
+            <a:pPr marL="0" indent="0" algn="ctr">
+              <a:buNone/>
+            </a:pPr>
+            <a:r>
+              <a:rPr lang="en-US" sz="1000" b="1" kern="0" spc="200" dirty="0">
                 <a:solidFill>
                   <a:srgbClr val="6E7BA0"/>
                 </a:solidFill>
@@ -16149,9 +16061,18 @@
   <p:clrMapOvr>
     <a:masterClrMapping/>
   </p:clrMapOvr>
-  <p:transition xmlns:p14="http://schemas.microsoft.com/office/powerpoint/2010/main" p14:dur="700" spd="slow">
-    <p159:morph xmlns:p159="http://schemas.microsoft.com/office/powerpoint/2015/09/main" option="byObject"/>
-  </p:transition>
+  <mc:AlternateContent xmlns:mc="http://schemas.openxmlformats.org/markup-compatibility/2006">
+    <mc:Choice xmlns:p159="http://schemas.microsoft.com/office/powerpoint/2015/09/main" Requires="p159">
+      <p:transition xmlns:p14="http://schemas.microsoft.com/office/powerpoint/2010/main" spd="med" p14:dur="700">
+        <p159:morph option="byObject"/>
+      </p:transition>
+    </mc:Choice>
+    <mc:Fallback>
+      <p:transition spd="med">
+        <p:fade/>
+      </p:transition>
+    </mc:Fallback>
+  </mc:AlternateContent>
 </p:sld>
 </file>
 
@@ -16448,4 +16369,299 @@
     </a:ext>
   </a:extLst>
 </a:theme>
+</file>
+
+<file path=ppt/theme/theme2.xml><?xml version="1.0" encoding="utf-8"?>
+<a:theme xmlns:a="http://schemas.openxmlformats.org/drawingml/2006/main" name="Office Theme">
+  <a:themeElements>
+    <a:clrScheme name="Office">
+      <a:dk1>
+        <a:sysClr val="windowText" lastClr="000000"/>
+      </a:dk1>
+      <a:lt1>
+        <a:sysClr val="window" lastClr="FFFFFF"/>
+      </a:lt1>
+      <a:dk2>
+        <a:srgbClr val="44546A"/>
+      </a:dk2>
+      <a:lt2>
+        <a:srgbClr val="E7E6E6"/>
+      </a:lt2>
+      <a:accent1>
+        <a:srgbClr val="4472C4"/>
+      </a:accent1>
+      <a:accent2>
+        <a:srgbClr val="ED7D31"/>
+      </a:accent2>
+      <a:accent3>
+        <a:srgbClr val="A5A5A5"/>
+      </a:accent3>
+      <a:accent4>
+        <a:srgbClr val="FFC000"/>
+      </a:accent4>
+      <a:accent5>
+        <a:srgbClr val="5B9BD5"/>
+      </a:accent5>
+      <a:accent6>
+        <a:srgbClr val="70AD47"/>
+      </a:accent6>
+      <a:hlink>
+        <a:srgbClr val="0563C1"/>
+      </a:hlink>
+      <a:folHlink>
+        <a:srgbClr val="954F72"/>
+      </a:folHlink>
+    </a:clrScheme>
+    <a:fontScheme name="Office">
+      <a:majorFont>
+        <a:latin typeface="Calibri Light" panose="020F0302020204030204"/>
+        <a:ea typeface=""/>
+        <a:cs typeface=""/>
+        <a:font script="Jpan" typeface="游ゴシック Light"/>
+        <a:font script="Hang" typeface="맑은 고딕"/>
+        <a:font script="Hans" typeface="等线 Light"/>
+        <a:font script="Hant" typeface="新細明體"/>
+        <a:font script="Arab" typeface="Times New Roman"/>
+        <a:font script="Hebr" typeface="Times New Roman"/>
+        <a:font script="Thai" typeface="Angsana New"/>
+        <a:font script="Ethi" typeface="Nyala"/>
+        <a:font script="Beng" typeface="Vrinda"/>
+        <a:font script="Gujr" typeface="Shruti"/>
+        <a:font script="Khmr" typeface="MoolBoran"/>
+        <a:font script="Knda" typeface="Tunga"/>
+        <a:font script="Guru" typeface="Raavi"/>
+        <a:font script="Cans" typeface="Euphemia"/>
+        <a:font script="Cher" typeface="Plantagenet Cherokee"/>
+        <a:font script="Yiii" typeface="Microsoft Yi Baiti"/>
+        <a:font script="Tibt" typeface="Microsoft Himalaya"/>
+        <a:font script="Thaa" typeface="MV Boli"/>
+        <a:font script="Deva" typeface="Mangal"/>
+        <a:font script="Telu" typeface="Gautami"/>
+        <a:font script="Taml" typeface="Latha"/>
+        <a:font script="Syrc" typeface="Estrangelo Edessa"/>
+        <a:font script="Orya" typeface="Kalinga"/>
+        <a:font script="Mlym" typeface="Kartika"/>
+        <a:font script="Laoo" typeface="DokChampa"/>
+        <a:font script="Sinh" typeface="Iskoola Pota"/>
+        <a:font script="Mong" typeface="Mongolian Baiti"/>
+        <a:font script="Viet" typeface="Times New Roman"/>
+        <a:font script="Uigh" typeface="Microsoft Uighur"/>
+        <a:font script="Geor" typeface="Sylfaen"/>
+        <a:font script="Armn" typeface="Arial"/>
+        <a:font script="Bugi" typeface="Leelawadee UI"/>
+        <a:font script="Bopo" typeface="Microsoft JhengHei"/>
+        <a:font script="Java" typeface="Javanese Text"/>
+        <a:font script="Lisu" typeface="Segoe UI"/>
+        <a:font script="Mymr" typeface="Myanmar Text"/>
+        <a:font script="Nkoo" typeface="Ebrima"/>
+        <a:font script="Olck" typeface="Nirmala UI"/>
+        <a:font script="Osma" typeface="Ebrima"/>
+        <a:font script="Phag" typeface="Phagspa"/>
+        <a:font script="Syrn" typeface="Estrangelo Edessa"/>
+        <a:font script="Syrj" typeface="Estrangelo Edessa"/>
+        <a:font script="Syre" typeface="Estrangelo Edessa"/>
+        <a:font script="Sora" typeface="Nirmala UI"/>
+        <a:font script="Tale" typeface="Microsoft Tai Le"/>
+        <a:font script="Talu" typeface="Microsoft New Tai Lue"/>
+        <a:font script="Tfng" typeface="Ebrima"/>
+      </a:majorFont>
+      <a:minorFont>
+        <a:latin typeface="Calibri" panose="020F0502020204030204"/>
+        <a:ea typeface=""/>
+        <a:cs typeface=""/>
+        <a:font script="Jpan" typeface="游ゴシック"/>
+        <a:font script="Hang" typeface="맑은 고딕"/>
+        <a:font script="Hans" typeface="等线"/>
+        <a:font script="Hant" typeface="新細明體"/>
+        <a:font script="Arab" typeface="Arial"/>
+        <a:font script="Hebr" typeface="Arial"/>
+        <a:font script="Thai" typeface="Cordia New"/>
+        <a:font script="Ethi" typeface="Nyala"/>
+        <a:font script="Beng" typeface="Vrinda"/>
+        <a:font script="Gujr" typeface="Shruti"/>
+        <a:font script="Khmr" typeface="DaunPenh"/>
+        <a:font script="Knda" typeface="Tunga"/>
+        <a:font script="Guru" typeface="Raavi"/>
+        <a:font script="Cans" typeface="Euphemia"/>
+        <a:font script="Cher" typeface="Plantagenet Cherokee"/>
+        <a:font script="Yiii" typeface="Microsoft Yi Baiti"/>
+        <a:font script="Tibt" typeface="Microsoft Himalaya"/>
+        <a:font script="Thaa" typeface="MV Boli"/>
+        <a:font script="Deva" typeface="Mangal"/>
+        <a:font script="Telu" typeface="Gautami"/>
+        <a:font script="Taml" typeface="Latha"/>
+        <a:font script="Syrc" typeface="Estrangelo Edessa"/>
+        <a:font script="Orya" typeface="Kalinga"/>
+        <a:font script="Mlym" typeface="Kartika"/>
+        <a:font script="Laoo" typeface="DokChampa"/>
+        <a:font script="Sinh" typeface="Iskoola Pota"/>
+        <a:font script="Mong" typeface="Mongolian Baiti"/>
+        <a:font script="Viet" typeface="Arial"/>
+        <a:font script="Uigh" typeface="Microsoft Uighur"/>
+        <a:font script="Geor" typeface="Sylfaen"/>
+        <a:font script="Armn" typeface="Arial"/>
+        <a:font script="Bugi" typeface="Leelawadee UI"/>
+        <a:font script="Bopo" typeface="Microsoft JhengHei"/>
+        <a:font script="Java" typeface="Javanese Text"/>
+        <a:font script="Lisu" typeface="Segoe UI"/>
+        <a:font script="Mymr" typeface="Myanmar Text"/>
+        <a:font script="Nkoo" typeface="Ebrima"/>
+        <a:font script="Olck" typeface="Nirmala UI"/>
+        <a:font script="Osma" typeface="Ebrima"/>
+        <a:font script="Phag" typeface="Phagspa"/>
+        <a:font script="Syrn" typeface="Estrangelo Edessa"/>
+        <a:font script="Syrj" typeface="Estrangelo Edessa"/>
+        <a:font script="Syre" typeface="Estrangelo Edessa"/>
+        <a:font script="Sora" typeface="Nirmala UI"/>
+        <a:font script="Tale" typeface="Microsoft Tai Le"/>
+        <a:font script="Talu" typeface="Microsoft New Tai Lue"/>
+        <a:font script="Tfng" typeface="Ebrima"/>
+      </a:minorFont>
+    </a:fontScheme>
+    <a:fmtScheme name="Office">
+      <a:fillStyleLst>
+        <a:solidFill>
+          <a:schemeClr val="phClr"/>
+        </a:solidFill>
+        <a:gradFill rotWithShape="1">
+          <a:gsLst>
+            <a:gs pos="0">
+              <a:schemeClr val="phClr">
+                <a:lumMod val="110000"/>
+                <a:satMod val="105000"/>
+                <a:tint val="67000"/>
+              </a:schemeClr>
+            </a:gs>
+            <a:gs pos="50000">
+              <a:schemeClr val="phClr">
+                <a:lumMod val="105000"/>
+                <a:satMod val="103000"/>
+                <a:tint val="73000"/>
+              </a:schemeClr>
+            </a:gs>
+            <a:gs pos="100000">
+              <a:schemeClr val="phClr">
+                <a:lumMod val="105000"/>
+                <a:satMod val="109000"/>
+                <a:tint val="81000"/>
+              </a:schemeClr>
+            </a:gs>
+          </a:gsLst>
+          <a:lin ang="5400000" scaled="0"/>
+        </a:gradFill>
+        <a:gradFill rotWithShape="1">
+          <a:gsLst>
+            <a:gs pos="0">
+              <a:schemeClr val="phClr">
+                <a:satMod val="103000"/>
+                <a:lumMod val="102000"/>
+                <a:tint val="94000"/>
+              </a:schemeClr>
+            </a:gs>
+            <a:gs pos="50000">
+              <a:schemeClr val="phClr">
+                <a:satMod val="110000"/>
+                <a:lumMod val="100000"/>
+                <a:shade val="100000"/>
+              </a:schemeClr>
+            </a:gs>
+            <a:gs pos="100000">
+              <a:schemeClr val="phClr">
+                <a:lumMod val="99000"/>
+                <a:satMod val="120000"/>
+                <a:shade val="78000"/>
+              </a:schemeClr>
+            </a:gs>
+          </a:gsLst>
+          <a:lin ang="5400000" scaled="0"/>
+        </a:gradFill>
+      </a:fillStyleLst>
+      <a:lnStyleLst>
+        <a:ln w="6350" cap="flat" cmpd="sng" algn="ctr">
+          <a:solidFill>
+            <a:schemeClr val="phClr"/>
+          </a:solidFill>
+          <a:prstDash val="solid"/>
+          <a:miter lim="800000"/>
+        </a:ln>
+        <a:ln w="12700" cap="flat" cmpd="sng" algn="ctr">
+          <a:solidFill>
+            <a:schemeClr val="phClr"/>
+          </a:solidFill>
+          <a:prstDash val="solid"/>
+          <a:miter lim="800000"/>
+        </a:ln>
+        <a:ln w="19050" cap="flat" cmpd="sng" algn="ctr">
+          <a:solidFill>
+            <a:schemeClr val="phClr"/>
+          </a:solidFill>
+          <a:prstDash val="solid"/>
+          <a:miter lim="800000"/>
+        </a:ln>
+      </a:lnStyleLst>
+      <a:effectStyleLst>
+        <a:effectStyle>
+          <a:effectLst/>
+        </a:effectStyle>
+        <a:effectStyle>
+          <a:effectLst/>
+        </a:effectStyle>
+        <a:effectStyle>
+          <a:effectLst>
+            <a:outerShdw blurRad="57150" dist="19050" dir="5400000" algn="ctr" rotWithShape="0">
+              <a:srgbClr val="000000">
+                <a:alpha val="63000"/>
+              </a:srgbClr>
+            </a:outerShdw>
+          </a:effectLst>
+        </a:effectStyle>
+      </a:effectStyleLst>
+      <a:bgFillStyleLst>
+        <a:solidFill>
+          <a:schemeClr val="phClr"/>
+        </a:solidFill>
+        <a:solidFill>
+          <a:schemeClr val="phClr">
+            <a:tint val="95000"/>
+            <a:satMod val="170000"/>
+          </a:schemeClr>
+        </a:solidFill>
+        <a:gradFill rotWithShape="1">
+          <a:gsLst>
+            <a:gs pos="0">
+              <a:schemeClr val="phClr">
+                <a:tint val="93000"/>
+                <a:satMod val="150000"/>
+                <a:shade val="98000"/>
+                <a:lumMod val="102000"/>
+              </a:schemeClr>
+            </a:gs>
+            <a:gs pos="50000">
+              <a:schemeClr val="phClr">
+                <a:tint val="98000"/>
+                <a:satMod val="130000"/>
+                <a:shade val="90000"/>
+                <a:lumMod val="103000"/>
+              </a:schemeClr>
+            </a:gs>
+            <a:gs pos="100000">
+              <a:schemeClr val="phClr">
+                <a:shade val="63000"/>
+                <a:satMod val="120000"/>
+              </a:schemeClr>
+            </a:gs>
+          </a:gsLst>
+          <a:lin ang="5400000" scaled="0"/>
+        </a:gradFill>
+      </a:bgFillStyleLst>
+    </a:fmtScheme>
+  </a:themeElements>
+  <a:objectDefaults/>
+  <a:extraClrSchemeLst/>
+  <a:extLst>
+    <a:ext uri="{05A4C25C-085E-4340-85A3-A5531E510DB2}">
+      <thm15:themeFamily xmlns:thm15="http://schemas.microsoft.com/office/thememl/2012/main" name="Office Theme" id="{62F939B6-93AF-4DB8-9C6B-D6C7DFDC589F}" vid="{4A3C46E8-61CC-4603-A589-7422A47A8E4A}"/>
+    </a:ext>
+  </a:extLst>
+</a:theme>
 </file>